--- a/Customer Churn Analytics And Prediction.pptx
+++ b/Customer Churn Analytics And Prediction.pptx
@@ -839,7 +839,7 @@
   <p:cSld>
     <p:spTree>
       <p:nvGrpSpPr>
-        <p:cNvPr id="142" name="Shape 142"/>
+        <p:cNvPr id="139" name="Shape 139"/>
         <p:cNvGrpSpPr/>
         <p:nvPr/>
       </p:nvGrpSpPr>
@@ -853,7 +853,7 @@
       </p:grpSpPr>
       <p:sp>
         <p:nvSpPr>
-          <p:cNvPr id="143" name="Google Shape;143;gc6f980f91_0_81:notes"/>
+          <p:cNvPr id="140" name="Google Shape;140;gc6f980f91_0_81:notes"/>
           <p:cNvSpPr/>
           <p:nvPr>
             <p:ph idx="2" type="sldImg"/>
@@ -888,7 +888,7 @@
       </p:sp>
       <p:sp>
         <p:nvSpPr>
-          <p:cNvPr id="144" name="Google Shape;144;gc6f980f91_0_81:notes"/>
+          <p:cNvPr id="141" name="Google Shape;141;gc6f980f91_0_81:notes"/>
           <p:cNvSpPr txBox="1"/>
           <p:nvPr>
             <p:ph idx="1" type="body"/>
@@ -938,7 +938,7 @@
   <p:cSld>
     <p:spTree>
       <p:nvGrpSpPr>
-        <p:cNvPr id="157" name="Shape 157"/>
+        <p:cNvPr id="154" name="Shape 154"/>
         <p:cNvGrpSpPr/>
         <p:nvPr/>
       </p:nvGrpSpPr>
@@ -952,7 +952,7 @@
       </p:grpSpPr>
       <p:sp>
         <p:nvSpPr>
-          <p:cNvPr id="158" name="Google Shape;158;g3ab15948158_0_54:notes"/>
+          <p:cNvPr id="155" name="Google Shape;155;g3ab15948158_0_54:notes"/>
           <p:cNvSpPr/>
           <p:nvPr>
             <p:ph idx="2" type="sldImg"/>
@@ -987,7 +987,7 @@
       </p:sp>
       <p:sp>
         <p:nvSpPr>
-          <p:cNvPr id="159" name="Google Shape;159;g3ab15948158_0_54:notes"/>
+          <p:cNvPr id="156" name="Google Shape;156;g3ab15948158_0_54:notes"/>
           <p:cNvSpPr txBox="1"/>
           <p:nvPr>
             <p:ph idx="1" type="body"/>
@@ -1037,7 +1037,7 @@
   <p:cSld>
     <p:spTree>
       <p:nvGrpSpPr>
-        <p:cNvPr id="163" name="Shape 163"/>
+        <p:cNvPr id="160" name="Shape 160"/>
         <p:cNvGrpSpPr/>
         <p:nvPr/>
       </p:nvGrpSpPr>
@@ -1051,7 +1051,7 @@
       </p:grpSpPr>
       <p:sp>
         <p:nvSpPr>
-          <p:cNvPr id="164" name="Google Shape;164;gc6f980f91_0_122:notes"/>
+          <p:cNvPr id="161" name="Google Shape;161;gc6f980f91_0_122:notes"/>
           <p:cNvSpPr/>
           <p:nvPr>
             <p:ph idx="2" type="sldImg"/>
@@ -1086,7 +1086,7 @@
       </p:sp>
       <p:sp>
         <p:nvSpPr>
-          <p:cNvPr id="165" name="Google Shape;165;gc6f980f91_0_122:notes"/>
+          <p:cNvPr id="162" name="Google Shape;162;gc6f980f91_0_122:notes"/>
           <p:cNvSpPr txBox="1"/>
           <p:nvPr>
             <p:ph idx="1" type="body"/>
@@ -1235,7 +1235,7 @@
   <p:cSld>
     <p:spTree>
       <p:nvGrpSpPr>
-        <p:cNvPr id="81" name="Shape 81"/>
+        <p:cNvPr id="78" name="Shape 78"/>
         <p:cNvGrpSpPr/>
         <p:nvPr/>
       </p:nvGrpSpPr>
@@ -1249,7 +1249,7 @@
       </p:grpSpPr>
       <p:sp>
         <p:nvSpPr>
-          <p:cNvPr id="82" name="Google Shape;82;gc6f980f91_0_5:notes"/>
+          <p:cNvPr id="79" name="Google Shape;79;gc6f980f91_0_5:notes"/>
           <p:cNvSpPr/>
           <p:nvPr>
             <p:ph idx="2" type="sldImg"/>
@@ -1284,7 +1284,7 @@
       </p:sp>
       <p:sp>
         <p:nvSpPr>
-          <p:cNvPr id="83" name="Google Shape;83;gc6f980f91_0_5:notes"/>
+          <p:cNvPr id="80" name="Google Shape;80;gc6f980f91_0_5:notes"/>
           <p:cNvSpPr txBox="1"/>
           <p:nvPr>
             <p:ph idx="1" type="body"/>
@@ -1334,7 +1334,7 @@
   <p:cSld>
     <p:spTree>
       <p:nvGrpSpPr>
-        <p:cNvPr id="87" name="Shape 87"/>
+        <p:cNvPr id="84" name="Shape 84"/>
         <p:cNvGrpSpPr/>
         <p:nvPr/>
       </p:nvGrpSpPr>
@@ -1348,7 +1348,7 @@
       </p:grpSpPr>
       <p:sp>
         <p:nvSpPr>
-          <p:cNvPr id="88" name="Google Shape;88;gc6f980f91_0_37:notes"/>
+          <p:cNvPr id="85" name="Google Shape;85;gc6f980f91_0_33:notes"/>
           <p:cNvSpPr/>
           <p:nvPr>
             <p:ph idx="2" type="sldImg"/>
@@ -1383,7 +1383,7 @@
       </p:sp>
       <p:sp>
         <p:nvSpPr>
-          <p:cNvPr id="89" name="Google Shape;89;gc6f980f91_0_37:notes"/>
+          <p:cNvPr id="86" name="Google Shape;86;gc6f980f91_0_33:notes"/>
           <p:cNvSpPr txBox="1"/>
           <p:nvPr>
             <p:ph idx="1" type="body"/>
@@ -1433,7 +1433,7 @@
   <p:cSld>
     <p:spTree>
       <p:nvGrpSpPr>
-        <p:cNvPr id="93" name="Shape 93"/>
+        <p:cNvPr id="89" name="Shape 89"/>
         <p:cNvGrpSpPr/>
         <p:nvPr/>
       </p:nvGrpSpPr>
@@ -1447,7 +1447,7 @@
       </p:grpSpPr>
       <p:sp>
         <p:nvSpPr>
-          <p:cNvPr id="94" name="Google Shape;94;gc6f980f91_0_33:notes"/>
+          <p:cNvPr id="90" name="Google Shape;90;gc6f980f91_0_37:notes"/>
           <p:cNvSpPr/>
           <p:nvPr>
             <p:ph idx="2" type="sldImg"/>
@@ -1482,7 +1482,7 @@
       </p:sp>
       <p:sp>
         <p:nvSpPr>
-          <p:cNvPr id="95" name="Google Shape;95;gc6f980f91_0_33:notes"/>
+          <p:cNvPr id="91" name="Google Shape;91;gc6f980f91_0_37:notes"/>
           <p:cNvSpPr txBox="1"/>
           <p:nvPr>
             <p:ph idx="1" type="body"/>
@@ -1532,7 +1532,7 @@
   <p:cSld>
     <p:spTree>
       <p:nvGrpSpPr>
-        <p:cNvPr id="98" name="Shape 98"/>
+        <p:cNvPr id="95" name="Shape 95"/>
         <p:cNvGrpSpPr/>
         <p:nvPr/>
       </p:nvGrpSpPr>
@@ -1546,7 +1546,7 @@
       </p:grpSpPr>
       <p:sp>
         <p:nvSpPr>
-          <p:cNvPr id="99" name="Google Shape;99;g3ab15948158_0_11:notes"/>
+          <p:cNvPr id="96" name="Google Shape;96;g3ab15948158_0_11:notes"/>
           <p:cNvSpPr/>
           <p:nvPr>
             <p:ph idx="2" type="sldImg"/>
@@ -1581,7 +1581,7 @@
       </p:sp>
       <p:sp>
         <p:nvSpPr>
-          <p:cNvPr id="100" name="Google Shape;100;g3ab15948158_0_11:notes"/>
+          <p:cNvPr id="97" name="Google Shape;97;g3ab15948158_0_11:notes"/>
           <p:cNvSpPr txBox="1"/>
           <p:nvPr>
             <p:ph idx="1" type="body"/>
@@ -1631,7 +1631,7 @@
   <p:cSld>
     <p:spTree>
       <p:nvGrpSpPr>
-        <p:cNvPr id="107" name="Shape 107"/>
+        <p:cNvPr id="104" name="Shape 104"/>
         <p:cNvGrpSpPr/>
         <p:nvPr/>
       </p:nvGrpSpPr>
@@ -1645,7 +1645,7 @@
       </p:grpSpPr>
       <p:sp>
         <p:nvSpPr>
-          <p:cNvPr id="108" name="Google Shape;108;g3ab15948158_0_21:notes"/>
+          <p:cNvPr id="105" name="Google Shape;105;g3ab15948158_0_21:notes"/>
           <p:cNvSpPr/>
           <p:nvPr>
             <p:ph idx="2" type="sldImg"/>
@@ -1680,7 +1680,7 @@
       </p:sp>
       <p:sp>
         <p:nvSpPr>
-          <p:cNvPr id="109" name="Google Shape;109;g3ab15948158_0_21:notes"/>
+          <p:cNvPr id="106" name="Google Shape;106;g3ab15948158_0_21:notes"/>
           <p:cNvSpPr txBox="1"/>
           <p:nvPr>
             <p:ph idx="1" type="body"/>
@@ -1730,7 +1730,7 @@
   <p:cSld>
     <p:spTree>
       <p:nvGrpSpPr>
-        <p:cNvPr id="113" name="Shape 113"/>
+        <p:cNvPr id="110" name="Shape 110"/>
         <p:cNvGrpSpPr/>
         <p:nvPr/>
       </p:nvGrpSpPr>
@@ -1744,7 +1744,7 @@
       </p:grpSpPr>
       <p:sp>
         <p:nvSpPr>
-          <p:cNvPr id="114" name="Google Shape;114;gc6f980f91_0_48:notes"/>
+          <p:cNvPr id="111" name="Google Shape;111;gc6f980f91_0_48:notes"/>
           <p:cNvSpPr/>
           <p:nvPr>
             <p:ph idx="2" type="sldImg"/>
@@ -1779,7 +1779,7 @@
       </p:sp>
       <p:sp>
         <p:nvSpPr>
-          <p:cNvPr id="115" name="Google Shape;115;gc6f980f91_0_48:notes"/>
+          <p:cNvPr id="112" name="Google Shape;112;gc6f980f91_0_48:notes"/>
           <p:cNvSpPr txBox="1"/>
           <p:nvPr>
             <p:ph idx="1" type="body"/>
@@ -1829,7 +1829,7 @@
   <p:cSld>
     <p:spTree>
       <p:nvGrpSpPr>
-        <p:cNvPr id="135" name="Shape 135"/>
+        <p:cNvPr id="132" name="Shape 132"/>
         <p:cNvGrpSpPr/>
         <p:nvPr/>
       </p:nvGrpSpPr>
@@ -1843,7 +1843,7 @@
       </p:grpSpPr>
       <p:sp>
         <p:nvSpPr>
-          <p:cNvPr id="136" name="Google Shape;136;g3ab15948158_0_41:notes"/>
+          <p:cNvPr id="133" name="Google Shape;133;g3ab15948158_0_41:notes"/>
           <p:cNvSpPr/>
           <p:nvPr>
             <p:ph idx="2" type="sldImg"/>
@@ -1878,7 +1878,7 @@
       </p:sp>
       <p:sp>
         <p:nvSpPr>
-          <p:cNvPr id="137" name="Google Shape;137;g3ab15948158_0_41:notes"/>
+          <p:cNvPr id="134" name="Google Shape;134;g3ab15948158_0_41:notes"/>
           <p:cNvSpPr txBox="1"/>
           <p:nvPr>
             <p:ph idx="1" type="body"/>
@@ -6455,6 +6455,9 @@
     <p:sldLayoutId id="2147483657" r:id="rId10"/>
     <p:sldLayoutId id="2147483658" r:id="rId11"/>
   </p:sldLayoutIdLst>
+  <p:transition spd="med">
+    <p:fade thruBlk="1"/>
+  </p:transition>
   <p:hf dt="0" ftr="0" hdr="0" sldNum="0"/>
   <p:txStyles>
     <p:titleStyle>
@@ -7268,7 +7271,7 @@
   <p:cSld>
     <p:spTree>
       <p:nvGrpSpPr>
-        <p:cNvPr id="145" name="Shape 145"/>
+        <p:cNvPr id="142" name="Shape 142"/>
         <p:cNvGrpSpPr/>
         <p:nvPr/>
       </p:nvGrpSpPr>
@@ -7282,7 +7285,7 @@
       </p:grpSpPr>
       <p:sp>
         <p:nvSpPr>
-          <p:cNvPr id="146" name="Google Shape;146;p22"/>
+          <p:cNvPr id="143" name="Google Shape;143;p22"/>
           <p:cNvSpPr txBox="1"/>
           <p:nvPr>
             <p:ph type="title"/>
@@ -7325,7 +7328,7 @@
                 <a:cs typeface="Oswald SemiBold"/>
                 <a:sym typeface="Oswald SemiBold"/>
               </a:rPr>
-              <a:t>Kết quả &amp; Thảo luận</a:t>
+              <a:t>Results:</a:t>
             </a:r>
             <a:endParaRPr sz="2400">
               <a:latin typeface="Oswald SemiBold"/>
@@ -7338,7 +7341,7 @@
       </p:sp>
       <p:grpSp>
         <p:nvGrpSpPr>
-          <p:cNvPr id="147" name="Google Shape;147;p22"/>
+          <p:cNvPr id="144" name="Google Shape;144;p22"/>
           <p:cNvGrpSpPr/>
           <p:nvPr/>
         </p:nvGrpSpPr>
@@ -7352,7 +7355,7 @@
         </p:grpSpPr>
         <p:sp>
           <p:nvSpPr>
-            <p:cNvPr id="148" name="Google Shape;148;p22"/>
+            <p:cNvPr id="145" name="Google Shape;145;p22"/>
             <p:cNvSpPr/>
             <p:nvPr/>
           </p:nvSpPr>
@@ -7395,7 +7398,7 @@
         </p:sp>
         <p:sp>
           <p:nvSpPr>
-            <p:cNvPr id="149" name="Google Shape;149;p22"/>
+            <p:cNvPr id="146" name="Google Shape;146;p22"/>
             <p:cNvSpPr/>
             <p:nvPr/>
           </p:nvSpPr>
@@ -7441,7 +7444,7 @@
       </p:grpSp>
       <p:sp>
         <p:nvSpPr>
-          <p:cNvPr id="150" name="Google Shape;150;p22"/>
+          <p:cNvPr id="147" name="Google Shape;147;p22"/>
           <p:cNvSpPr txBox="1"/>
           <p:nvPr>
             <p:ph idx="4294967295" type="body"/>
@@ -7462,7 +7465,7 @@
           </a:bodyPr>
           <a:lstStyle/>
           <a:p>
-            <a:pPr indent="0" lvl="0" marL="0" rtl="0" algn="l">
+            <a:pPr indent="0" lvl="0" marL="0" rtl="0" algn="ctr">
               <a:lnSpc>
                 <a:spcPct val="100000"/>
               </a:lnSpc>
@@ -7484,7 +7487,7 @@
                 <a:cs typeface="Oswald SemiBold"/>
                 <a:sym typeface="Oswald SemiBold"/>
               </a:rPr>
-              <a:t>Điểm mạnh của mô hình</a:t>
+              <a:t>Advantages</a:t>
             </a:r>
             <a:endParaRPr>
               <a:solidFill>
@@ -7500,7 +7503,7 @@
       </p:sp>
       <p:sp>
         <p:nvSpPr>
-          <p:cNvPr id="151" name="Google Shape;151;p22"/>
+          <p:cNvPr id="148" name="Google Shape;148;p22"/>
           <p:cNvSpPr txBox="1"/>
           <p:nvPr>
             <p:ph idx="4294967295" type="body"/>
@@ -7545,7 +7548,7 @@
                 <a:cs typeface="Oswald"/>
                 <a:sym typeface="Oswald"/>
               </a:rPr>
-              <a:t>Mô hình làm rất tốt việc xác định những khách hàng </a:t>
+              <a:t>The model does a very good job of identifying customers </a:t>
             </a:r>
             <a:r>
               <a:rPr b="1" lang="vi" sz="1400">
@@ -7557,7 +7560,7 @@
                 <a:cs typeface="Oswald"/>
                 <a:sym typeface="Oswald"/>
               </a:rPr>
-              <a:t>sẽ không rời đi</a:t>
+              <a:t>who will not leave</a:t>
             </a:r>
             <a:r>
               <a:rPr lang="vi" sz="1400">
@@ -7585,7 +7588,7 @@
       </p:sp>
       <p:grpSp>
         <p:nvGrpSpPr>
-          <p:cNvPr id="152" name="Google Shape;152;p22"/>
+          <p:cNvPr id="149" name="Google Shape;149;p22"/>
           <p:cNvGrpSpPr/>
           <p:nvPr/>
         </p:nvGrpSpPr>
@@ -7599,7 +7602,7 @@
         </p:grpSpPr>
         <p:sp>
           <p:nvSpPr>
-            <p:cNvPr id="153" name="Google Shape;153;p22"/>
+            <p:cNvPr id="150" name="Google Shape;150;p22"/>
             <p:cNvSpPr/>
             <p:nvPr/>
           </p:nvSpPr>
@@ -7642,7 +7645,7 @@
         </p:sp>
         <p:sp>
           <p:nvSpPr>
-            <p:cNvPr id="154" name="Google Shape;154;p22"/>
+            <p:cNvPr id="151" name="Google Shape;151;p22"/>
             <p:cNvSpPr/>
             <p:nvPr/>
           </p:nvSpPr>
@@ -7688,7 +7691,7 @@
       </p:grpSp>
       <p:sp>
         <p:nvSpPr>
-          <p:cNvPr id="155" name="Google Shape;155;p22"/>
+          <p:cNvPr id="152" name="Google Shape;152;p22"/>
           <p:cNvSpPr txBox="1"/>
           <p:nvPr>
             <p:ph idx="4294967295" type="body"/>
@@ -7709,7 +7712,7 @@
           </a:bodyPr>
           <a:lstStyle/>
           <a:p>
-            <a:pPr indent="0" lvl="0" marL="0" rtl="0" algn="l">
+            <a:pPr indent="0" lvl="0" marL="0" rtl="0" algn="ctr">
               <a:lnSpc>
                 <a:spcPct val="100000"/>
               </a:lnSpc>
@@ -7731,7 +7734,7 @@
                 <a:cs typeface="Oswald SemiBold"/>
                 <a:sym typeface="Oswald SemiBold"/>
               </a:rPr>
-              <a:t>Điểm yếu cần cải thiện</a:t>
+              <a:t>Disadvantages</a:t>
             </a:r>
             <a:endParaRPr>
               <a:solidFill>
@@ -7747,7 +7750,7 @@
       </p:sp>
       <p:sp>
         <p:nvSpPr>
-          <p:cNvPr id="156" name="Google Shape;156;p22"/>
+          <p:cNvPr id="153" name="Google Shape;153;p22"/>
           <p:cNvSpPr txBox="1"/>
           <p:nvPr>
             <p:ph idx="4294967295" type="body"/>
@@ -7792,7 +7795,7 @@
                 <a:cs typeface="Oswald"/>
                 <a:sym typeface="Oswald"/>
               </a:rPr>
-              <a:t>Recall thấp (42.4%)</a:t>
+              <a:t>The low recall rate (42.4%) </a:t>
             </a:r>
             <a:r>
               <a:rPr lang="vi" sz="1400">
@@ -7804,7 +7807,7 @@
                 <a:cs typeface="Oswald"/>
                 <a:sym typeface="Oswald"/>
               </a:rPr>
-              <a:t> là vấn đề lớn nhất. Mô hình đã bỏ sót một lượng lớn khách hàng sắp rời đi (False Negatives: 1664).</a:t>
+              <a:t>is the biggest problem. The model missed a large number of customers who were about to leave (False Negatives: 1664).</a:t>
             </a:r>
             <a:endParaRPr sz="1400">
               <a:solidFill>
@@ -7831,7 +7834,7 @@
   <p:cSld>
     <p:spTree>
       <p:nvGrpSpPr>
-        <p:cNvPr id="160" name="Shape 160"/>
+        <p:cNvPr id="157" name="Shape 157"/>
         <p:cNvGrpSpPr/>
         <p:nvPr/>
       </p:nvGrpSpPr>
@@ -7845,7 +7848,7 @@
       </p:grpSpPr>
       <p:sp>
         <p:nvSpPr>
-          <p:cNvPr id="161" name="Google Shape;161;p23"/>
+          <p:cNvPr id="158" name="Google Shape;158;p23"/>
           <p:cNvSpPr txBox="1"/>
           <p:nvPr>
             <p:ph type="title"/>
@@ -7882,7 +7885,7 @@
                 <a:cs typeface="Oswald SemiBold"/>
                 <a:sym typeface="Oswald SemiBold"/>
               </a:rPr>
-              <a:t>Kết luận </a:t>
+              <a:t>SUMMARY:</a:t>
             </a:r>
             <a:endParaRPr sz="2400">
               <a:latin typeface="Oswald SemiBold"/>
@@ -7895,7 +7898,7 @@
       </p:sp>
       <p:sp>
         <p:nvSpPr>
-          <p:cNvPr id="162" name="Google Shape;162;p23"/>
+          <p:cNvPr id="159" name="Google Shape;159;p23"/>
           <p:cNvSpPr txBox="1"/>
           <p:nvPr>
             <p:ph idx="1" type="body"/>
@@ -7940,7 +7943,7 @@
                 <a:cs typeface="Oswald"/>
                 <a:sym typeface="Oswald"/>
               </a:rPr>
-              <a:t>Kết luận chính:</a:t>
+              <a:t>Conclude:</a:t>
             </a:r>
             <a:endParaRPr b="1" sz="1400">
               <a:solidFill>
@@ -7977,7 +7980,7 @@
                 <a:cs typeface="Oswald"/>
                 <a:sym typeface="Oswald"/>
               </a:rPr>
-              <a:t>Hành vi tương tác (thời gian, số trang, tần suất đăng nhập) và các dấu hiệu không hài lòng (cuộc gọi hỗ trợ, bỏ giỏ hàng) là những yếu tố dự báo churn mạnh mẽ nhất.</a:t>
+              <a:t>Interaction behavior (time spent, number of pages, login frequency) and signs of dissatisfaction (support calls, abandoned carts) are the strongest predictors of churn.</a:t>
             </a:r>
             <a:endParaRPr sz="1200">
               <a:solidFill>
@@ -8037,7 +8040,7 @@
                 <a:cs typeface="Oswald"/>
                 <a:sym typeface="Oswald"/>
               </a:rPr>
-              <a:t>Đề xuất:</a:t>
+              <a:t>Propose:</a:t>
             </a:r>
             <a:endParaRPr sz="1300">
               <a:solidFill>
@@ -8074,7 +8077,7 @@
                 <a:cs typeface="Oswald"/>
                 <a:sym typeface="Oswald"/>
               </a:rPr>
-              <a:t>Triển khai chiến dịch giữ chân khách hàng mục tiêu:</a:t>
+              <a:t>Customer segmentation and retention:</a:t>
             </a:r>
             <a:endParaRPr b="1" sz="1200">
               <a:solidFill>
@@ -8111,73 +8114,7 @@
                 <a:cs typeface="Oswald"/>
                 <a:sym typeface="Oswald"/>
               </a:rPr>
-              <a:t>Phân khúc rủi ro cao:</a:t>
-            </a:r>
-            <a:r>
-              <a:rPr lang="vi" sz="1200">
-                <a:solidFill>
-                  <a:srgbClr val="CCCCCC"/>
-                </a:solidFill>
-                <a:latin typeface="Oswald"/>
-                <a:ea typeface="Oswald"/>
-                <a:cs typeface="Oswald"/>
-                <a:sym typeface="Oswald"/>
-              </a:rPr>
-              <a:t> Gửi ưu đãi, voucher cho nhóm khách hàng có số </a:t>
-            </a:r>
-            <a:r>
-              <a:rPr lang="vi" sz="1200">
-                <a:solidFill>
-                  <a:srgbClr val="D0D0D0"/>
-                </a:solidFill>
-                <a:highlight>
-                  <a:srgbClr val="3C3C3C"/>
-                </a:highlight>
-                <a:latin typeface="Oswald"/>
-                <a:ea typeface="Oswald"/>
-                <a:cs typeface="Oswald"/>
-                <a:sym typeface="Oswald"/>
-              </a:rPr>
-              <a:t>Customer_Service_Calls</a:t>
-            </a:r>
-            <a:r>
-              <a:rPr lang="vi" sz="1200">
-                <a:solidFill>
-                  <a:srgbClr val="CCCCCC"/>
-                </a:solidFill>
-                <a:latin typeface="Oswald"/>
-                <a:ea typeface="Oswald"/>
-                <a:cs typeface="Oswald"/>
-                <a:sym typeface="Oswald"/>
-              </a:rPr>
-              <a:t> cao hoặc </a:t>
-            </a:r>
-            <a:r>
-              <a:rPr lang="vi" sz="1200">
-                <a:solidFill>
-                  <a:srgbClr val="D0D0D0"/>
-                </a:solidFill>
-                <a:highlight>
-                  <a:srgbClr val="3C3C3C"/>
-                </a:highlight>
-                <a:latin typeface="Oswald"/>
-                <a:ea typeface="Oswald"/>
-                <a:cs typeface="Oswald"/>
-                <a:sym typeface="Oswald"/>
-              </a:rPr>
-              <a:t>Days_Since_Last_Purchase</a:t>
-            </a:r>
-            <a:r>
-              <a:rPr lang="vi" sz="1200">
-                <a:solidFill>
-                  <a:srgbClr val="CCCCCC"/>
-                </a:solidFill>
-                <a:latin typeface="Oswald"/>
-                <a:ea typeface="Oswald"/>
-                <a:cs typeface="Oswald"/>
-                <a:sym typeface="Oswald"/>
-              </a:rPr>
-              <a:t> lớn.</a:t>
+              <a:t>High-risk segment: Send offers and vouchers to customer groups with a high number of Customer_Service_Calls or a large number of Days_Since_Last_Purchases.</a:t>
             </a:r>
             <a:endParaRPr sz="1200">
               <a:solidFill>
@@ -8214,19 +8151,7 @@
                 <a:cs typeface="Oswald"/>
                 <a:sym typeface="Oswald"/>
               </a:rPr>
-              <a:t>Tăng tương tác:</a:t>
-            </a:r>
-            <a:r>
-              <a:rPr lang="vi" sz="1200">
-                <a:solidFill>
-                  <a:srgbClr val="CCCCCC"/>
-                </a:solidFill>
-                <a:latin typeface="Oswald"/>
-                <a:ea typeface="Oswald"/>
-                <a:cs typeface="Oswald"/>
-                <a:sym typeface="Oswald"/>
-              </a:rPr>
-              <a:t> Tạo các chiến dịch email/thông báo đẩy (push notification) cá nhân hóa để khuyến khích khách hàng đăng nhập và sử dụng app thường xuyên hơn.</a:t>
+              <a:t>Increase engagement: Create personalized email/push notification campaigns to encourage customers to log in and use the app more frequently.</a:t>
             </a:r>
             <a:endParaRPr sz="1200">
               <a:solidFill>
@@ -8263,19 +8188,7 @@
                 <a:cs typeface="Oswald"/>
                 <a:sym typeface="Oswald"/>
               </a:rPr>
-              <a:t>Theo dõi các chỉ số "cảnh báo sớm":</a:t>
-            </a:r>
-            <a:r>
-              <a:rPr lang="vi" sz="1200">
-                <a:solidFill>
-                  <a:srgbClr val="CCCCCC"/>
-                </a:solidFill>
-                <a:latin typeface="Oswald"/>
-                <a:ea typeface="Oswald"/>
-                <a:cs typeface="Oswald"/>
-                <a:sym typeface="Oswald"/>
-              </a:rPr>
-              <a:t> Xây dựng một dashboard theo dõi các chỉ số quan trọng (tỷ lệ bỏ giỏ hàng, số cuộc gọi hỗ trợ).</a:t>
+              <a:t>Monitor "early warning" metrics: Build a dashboard to track key metrics (cart abandonment rate, number of support calls).</a:t>
             </a:r>
             <a:endParaRPr sz="1200">
               <a:solidFill>
@@ -8317,7 +8230,7 @@
   <p:cSld>
     <p:spTree>
       <p:nvGrpSpPr>
-        <p:cNvPr id="166" name="Shape 166"/>
+        <p:cNvPr id="163" name="Shape 163"/>
         <p:cNvGrpSpPr/>
         <p:nvPr/>
       </p:nvGrpSpPr>
@@ -8331,7 +8244,7 @@
       </p:grpSpPr>
       <p:sp>
         <p:nvSpPr>
-          <p:cNvPr id="167" name="Google Shape;167;p24"/>
+          <p:cNvPr id="164" name="Google Shape;164;p24"/>
           <p:cNvSpPr/>
           <p:nvPr/>
         </p:nvSpPr>
@@ -8374,7 +8287,7 @@
       </p:sp>
       <p:sp>
         <p:nvSpPr>
-          <p:cNvPr id="168" name="Google Shape;168;p24"/>
+          <p:cNvPr id="165" name="Google Shape;165;p24"/>
           <p:cNvSpPr txBox="1"/>
           <p:nvPr>
             <p:ph idx="4294967295" type="title"/>
@@ -8422,7 +8335,7 @@
       </p:sp>
       <p:sp>
         <p:nvSpPr>
-          <p:cNvPr id="169" name="Google Shape;169;p24"/>
+          <p:cNvPr id="166" name="Google Shape;166;p24"/>
           <p:cNvSpPr txBox="1"/>
           <p:nvPr>
             <p:ph idx="4294967295" type="title"/>
@@ -8519,7 +8432,7 @@
             </a:pPr>
             <a:r>
               <a:rPr lang="vi"/>
-              <a:t>Hiểu rõ vấn đề</a:t>
+              <a:t>The problem</a:t>
             </a:r>
             <a:endParaRPr/>
           </a:p>
@@ -8640,62 +8553,6 @@
         </p:nvSpPr>
         <p:spPr>
           <a:xfrm>
-            <a:off x="3385775" y="1228700"/>
-            <a:ext cx="2494500" cy="461400"/>
-          </a:xfrm>
-          <a:prstGeom prst="rect">
-            <a:avLst/>
-          </a:prstGeom>
-        </p:spPr>
-        <p:txBody>
-          <a:bodyPr anchorCtr="0" anchor="t" bIns="91425" lIns="91425" spcFirstLastPara="1" rIns="91425" wrap="square" tIns="91425">
-            <a:noAutofit/>
-          </a:bodyPr>
-          <a:lstStyle/>
-          <a:p>
-            <a:pPr indent="0" lvl="0" marL="0" rtl="0" algn="l">
-              <a:spcBef>
-                <a:spcPts val="0"/>
-              </a:spcBef>
-              <a:spcAft>
-                <a:spcPts val="0"/>
-              </a:spcAft>
-              <a:buNone/>
-            </a:pPr>
-            <a:r>
-              <a:rPr lang="vi">
-                <a:solidFill>
-                  <a:schemeClr val="lt1"/>
-                </a:solidFill>
-                <a:latin typeface="Oswald SemiBold"/>
-                <a:ea typeface="Oswald SemiBold"/>
-                <a:cs typeface="Oswald SemiBold"/>
-                <a:sym typeface="Oswald SemiBold"/>
-              </a:rPr>
-              <a:t>Vấn Đề:</a:t>
-            </a:r>
-            <a:endParaRPr>
-              <a:solidFill>
-                <a:schemeClr val="lt1"/>
-              </a:solidFill>
-              <a:latin typeface="Oswald SemiBold"/>
-              <a:ea typeface="Oswald SemiBold"/>
-              <a:cs typeface="Oswald SemiBold"/>
-              <a:sym typeface="Oswald SemiBold"/>
-            </a:endParaRPr>
-          </a:p>
-        </p:txBody>
-      </p:sp>
-      <p:sp>
-        <p:nvSpPr>
-          <p:cNvPr id="70" name="Google Shape;70;p14"/>
-          <p:cNvSpPr txBox="1"/>
-          <p:nvPr>
-            <p:ph idx="4294967295" type="body"/>
-          </p:nvPr>
-        </p:nvSpPr>
-        <p:spPr>
-          <a:xfrm>
             <a:off x="3387675" y="1774125"/>
             <a:ext cx="2478600" cy="2794800"/>
           </a:xfrm>
@@ -8719,7 +8576,7 @@
               <a:buNone/>
             </a:pPr>
             <a:r>
-              <a:rPr lang="vi">
+              <a:rPr i="1" lang="vi">
                 <a:solidFill>
                   <a:srgbClr val="CCCCCC"/>
                 </a:solidFill>
@@ -8728,9 +8585,9 @@
                 <a:cs typeface="Oswald"/>
                 <a:sym typeface="Oswald"/>
               </a:rPr>
-              <a:t>Giữ chân khách hàng là yếu tố sống còn trong TMĐT. Chi phí để có một khách hàng mới cao hơn nhiều so với việc giữ chân khách hàng cũ.</a:t>
+              <a:t>Customer retention is crucial in e-commerce. The cost of acquiring a new customer is significantly higher than the cost of retaining an existing one.</a:t>
             </a:r>
-            <a:endParaRPr>
+            <a:endParaRPr i="1">
               <a:latin typeface="Oswald"/>
               <a:ea typeface="Oswald"/>
               <a:cs typeface="Oswald"/>
@@ -8741,7 +8598,7 @@
       </p:sp>
       <p:grpSp>
         <p:nvGrpSpPr>
-          <p:cNvPr id="71" name="Google Shape;71;p14"/>
+          <p:cNvPr id="70" name="Google Shape;70;p14"/>
           <p:cNvGrpSpPr/>
           <p:nvPr/>
         </p:nvGrpSpPr>
@@ -8755,7 +8612,7 @@
         </p:grpSpPr>
         <p:sp>
           <p:nvSpPr>
-            <p:cNvPr id="72" name="Google Shape;72;p14"/>
+            <p:cNvPr id="71" name="Google Shape;71;p14"/>
             <p:cNvSpPr txBox="1"/>
             <p:nvPr/>
           </p:nvSpPr>
@@ -8798,7 +8655,7 @@
         </p:sp>
         <p:sp>
           <p:nvSpPr>
-            <p:cNvPr id="73" name="Google Shape;73;p14"/>
+            <p:cNvPr id="72" name="Google Shape;72;p14"/>
             <p:cNvSpPr/>
             <p:nvPr/>
           </p:nvSpPr>
@@ -8846,63 +8703,7 @@
       </p:grpSp>
       <p:sp>
         <p:nvSpPr>
-          <p:cNvPr id="74" name="Google Shape;74;p14"/>
-          <p:cNvSpPr txBox="1"/>
-          <p:nvPr>
-            <p:ph idx="4294967295" type="body"/>
-          </p:nvPr>
-        </p:nvSpPr>
-        <p:spPr>
-          <a:xfrm>
-            <a:off x="6268800" y="1228700"/>
-            <a:ext cx="2494500" cy="461400"/>
-          </a:xfrm>
-          <a:prstGeom prst="rect">
-            <a:avLst/>
-          </a:prstGeom>
-        </p:spPr>
-        <p:txBody>
-          <a:bodyPr anchorCtr="0" anchor="t" bIns="91425" lIns="91425" spcFirstLastPara="1" rIns="91425" wrap="square" tIns="91425">
-            <a:noAutofit/>
-          </a:bodyPr>
-          <a:lstStyle/>
-          <a:p>
-            <a:pPr indent="0" lvl="0" marL="0" rtl="0" algn="l">
-              <a:spcBef>
-                <a:spcPts val="0"/>
-              </a:spcBef>
-              <a:spcAft>
-                <a:spcPts val="0"/>
-              </a:spcAft>
-              <a:buNone/>
-            </a:pPr>
-            <a:r>
-              <a:rPr lang="vi">
-                <a:solidFill>
-                  <a:schemeClr val="lt1"/>
-                </a:solidFill>
-                <a:latin typeface="Oswald SemiBold"/>
-                <a:ea typeface="Oswald SemiBold"/>
-                <a:cs typeface="Oswald SemiBold"/>
-                <a:sym typeface="Oswald SemiBold"/>
-              </a:rPr>
-              <a:t>Hành động:</a:t>
-            </a:r>
-            <a:endParaRPr>
-              <a:solidFill>
-                <a:schemeClr val="lt1"/>
-              </a:solidFill>
-              <a:latin typeface="Oswald SemiBold"/>
-              <a:ea typeface="Oswald SemiBold"/>
-              <a:cs typeface="Oswald SemiBold"/>
-              <a:sym typeface="Oswald SemiBold"/>
-            </a:endParaRPr>
-          </a:p>
-        </p:txBody>
-      </p:sp>
-      <p:sp>
-        <p:nvSpPr>
-          <p:cNvPr id="75" name="Google Shape;75;p14"/>
+          <p:cNvPr id="73" name="Google Shape;73;p14"/>
           <p:cNvSpPr txBox="1"/>
           <p:nvPr>
             <p:ph idx="4294967295" type="body"/>
@@ -8933,7 +8734,7 @@
               <a:buNone/>
             </a:pPr>
             <a:r>
-              <a:rPr lang="vi" sz="1600">
+              <a:rPr i="1" lang="vi" sz="1600">
                 <a:solidFill>
                   <a:srgbClr val="CCCCCC"/>
                 </a:solidFill>
@@ -8942,9 +8743,9 @@
                 <a:cs typeface="Oswald"/>
                 <a:sym typeface="Oswald"/>
               </a:rPr>
-              <a:t>Xác định các yếu tố ảnh hưởng đến việc khách hàng rời bỏ.</a:t>
+              <a:t>Identify factors influencing customer churn.</a:t>
             </a:r>
-            <a:endParaRPr sz="1600">
+            <a:endParaRPr i="1" sz="1600">
               <a:solidFill>
                 <a:srgbClr val="CCCCCC"/>
               </a:solidFill>
@@ -8965,7 +8766,7 @@
               <a:buNone/>
             </a:pPr>
             <a:r>
-              <a:rPr lang="vi" sz="1600">
+              <a:rPr i="1" lang="vi" sz="1600">
                 <a:solidFill>
                   <a:srgbClr val="CCCCCC"/>
                 </a:solidFill>
@@ -8974,9 +8775,9 @@
                 <a:cs typeface="Oswald"/>
                 <a:sym typeface="Oswald"/>
               </a:rPr>
-              <a:t>Phân khúc khách hàng dựa trên xác suất rời bỏ.</a:t>
+              <a:t>Segment customers based on the probability of churn.</a:t>
             </a:r>
-            <a:endParaRPr sz="1600">
+            <a:endParaRPr i="1" sz="1600">
               <a:solidFill>
                 <a:srgbClr val="CCCCCC"/>
               </a:solidFill>
@@ -8992,12 +8793,12 @@
                 <a:spcPts val="1000"/>
               </a:spcBef>
               <a:spcAft>
-                <a:spcPts val="1000"/>
+                <a:spcPts val="0"/>
               </a:spcAft>
               <a:buNone/>
             </a:pPr>
             <a:r>
-              <a:rPr lang="vi" sz="1600">
+              <a:rPr i="1" lang="vi" sz="1600">
                 <a:solidFill>
                   <a:srgbClr val="CCCCCC"/>
                 </a:solidFill>
@@ -9006,9 +8807,35 @@
                 <a:cs typeface="Oswald"/>
                 <a:sym typeface="Oswald"/>
               </a:rPr>
-              <a:t>Xây dựng mô hình dự đoán để xác định sớm các khách hàng có nguy cơ cao.</a:t>
+              <a:t>Develop predictive models to identify high-risk customers early on.</a:t>
             </a:r>
-            <a:endParaRPr sz="1600">
+            <a:endParaRPr i="1" sz="1600">
+              <a:solidFill>
+                <a:srgbClr val="CCCCCC"/>
+              </a:solidFill>
+              <a:latin typeface="Oswald"/>
+              <a:ea typeface="Oswald"/>
+              <a:cs typeface="Oswald"/>
+              <a:sym typeface="Oswald"/>
+            </a:endParaRPr>
+          </a:p>
+          <a:p>
+            <a:pPr indent="0" lvl="0" marL="0" rtl="0" algn="l">
+              <a:spcBef>
+                <a:spcPts val="1000"/>
+              </a:spcBef>
+              <a:spcAft>
+                <a:spcPts val="1000"/>
+              </a:spcAft>
+              <a:buNone/>
+            </a:pPr>
+            <a:r>
+              <a:t/>
+            </a:r>
+            <a:endParaRPr i="1" sz="1600">
+              <a:solidFill>
+                <a:srgbClr val="CCCCCC"/>
+              </a:solidFill>
               <a:latin typeface="Oswald"/>
               <a:ea typeface="Oswald"/>
               <a:cs typeface="Oswald"/>
@@ -9019,7 +8846,7 @@
       </p:sp>
       <p:grpSp>
         <p:nvGrpSpPr>
-          <p:cNvPr id="76" name="Google Shape;76;p14"/>
+          <p:cNvPr id="74" name="Google Shape;74;p14"/>
           <p:cNvGrpSpPr/>
           <p:nvPr/>
         </p:nvGrpSpPr>
@@ -9033,7 +8860,7 @@
         </p:grpSpPr>
         <p:sp>
           <p:nvSpPr>
-            <p:cNvPr id="77" name="Google Shape;77;p14"/>
+            <p:cNvPr id="75" name="Google Shape;75;p14"/>
             <p:cNvSpPr/>
             <p:nvPr/>
           </p:nvSpPr>
@@ -9080,7 +8907,7 @@
         </p:sp>
         <p:sp>
           <p:nvSpPr>
-            <p:cNvPr id="78" name="Google Shape;78;p14"/>
+            <p:cNvPr id="76" name="Google Shape;76;p14"/>
             <p:cNvSpPr txBox="1"/>
             <p:nvPr/>
           </p:nvSpPr>
@@ -9124,63 +8951,7 @@
       </p:grpSp>
       <p:sp>
         <p:nvSpPr>
-          <p:cNvPr id="79" name="Google Shape;79;p14"/>
-          <p:cNvSpPr txBox="1"/>
-          <p:nvPr>
-            <p:ph idx="4294967295" type="body"/>
-          </p:nvPr>
-        </p:nvSpPr>
-        <p:spPr>
-          <a:xfrm>
-            <a:off x="479100" y="1228700"/>
-            <a:ext cx="2494500" cy="461400"/>
-          </a:xfrm>
-          <a:prstGeom prst="rect">
-            <a:avLst/>
-          </a:prstGeom>
-        </p:spPr>
-        <p:txBody>
-          <a:bodyPr anchorCtr="0" anchor="t" bIns="91425" lIns="91425" spcFirstLastPara="1" rIns="91425" wrap="square" tIns="91425">
-            <a:noAutofit/>
-          </a:bodyPr>
-          <a:lstStyle/>
-          <a:p>
-            <a:pPr indent="0" lvl="0" marL="0" rtl="0" algn="l">
-              <a:spcBef>
-                <a:spcPts val="0"/>
-              </a:spcBef>
-              <a:spcAft>
-                <a:spcPts val="0"/>
-              </a:spcAft>
-              <a:buNone/>
-            </a:pPr>
-            <a:r>
-              <a:rPr lang="vi">
-                <a:solidFill>
-                  <a:schemeClr val="lt1"/>
-                </a:solidFill>
-                <a:latin typeface="Oswald SemiBold"/>
-                <a:ea typeface="Oswald SemiBold"/>
-                <a:cs typeface="Oswald SemiBold"/>
-                <a:sym typeface="Oswald SemiBold"/>
-              </a:rPr>
-              <a:t>Câu Chuyện:</a:t>
-            </a:r>
-            <a:endParaRPr>
-              <a:solidFill>
-                <a:schemeClr val="lt1"/>
-              </a:solidFill>
-              <a:latin typeface="Oswald SemiBold"/>
-              <a:ea typeface="Oswald SemiBold"/>
-              <a:cs typeface="Oswald SemiBold"/>
-              <a:sym typeface="Oswald SemiBold"/>
-            </a:endParaRPr>
-          </a:p>
-        </p:txBody>
-      </p:sp>
-      <p:sp>
-        <p:nvSpPr>
-          <p:cNvPr id="80" name="Google Shape;80;p14"/>
+          <p:cNvPr id="77" name="Google Shape;77;p14"/>
           <p:cNvSpPr txBox="1"/>
           <p:nvPr>
             <p:ph idx="4294967295" type="body"/>
@@ -9220,7 +8991,7 @@
                 <a:cs typeface="Oswald"/>
                 <a:sym typeface="Oswald"/>
               </a:rPr>
-              <a:t>Dữ liệu của chúng ta kể một câu chuyện về sự tương tác và sự không hài lòng. Phân tích này giúp chúng ta hiểu rõ các "tín hiệu" đó.</a:t>
+              <a:t>Our data tells a story of interaction and dissatisfaction. This analysis helps us understand those "signals."</a:t>
             </a:r>
             <a:endParaRPr sz="1600">
               <a:latin typeface="Oswald"/>
@@ -9244,7 +9015,7 @@
   <p:cSld>
     <p:spTree>
       <p:nvGrpSpPr>
-        <p:cNvPr id="84" name="Shape 84"/>
+        <p:cNvPr id="81" name="Shape 81"/>
         <p:cNvGrpSpPr/>
         <p:nvPr/>
       </p:nvGrpSpPr>
@@ -9258,7 +9029,7 @@
       </p:grpSpPr>
       <p:sp>
         <p:nvSpPr>
-          <p:cNvPr id="85" name="Google Shape;85;p15"/>
+          <p:cNvPr id="82" name="Google Shape;82;p15"/>
           <p:cNvSpPr txBox="1"/>
           <p:nvPr>
             <p:ph type="title"/>
@@ -9290,7 +9061,7 @@
             </a:pPr>
             <a:r>
               <a:rPr lang="vi"/>
-              <a:t>Tổng quan dữ liệu</a:t>
+              <a:t>Dataset Overview</a:t>
             </a:r>
             <a:endParaRPr/>
           </a:p>
@@ -9298,7 +9069,7 @@
       </p:sp>
       <p:sp>
         <p:nvSpPr>
-          <p:cNvPr id="86" name="Google Shape;86;p15"/>
+          <p:cNvPr id="83" name="Google Shape;83;p15"/>
           <p:cNvSpPr txBox="1"/>
           <p:nvPr>
             <p:ph idx="1" type="body"/>
@@ -9343,7 +9114,7 @@
                 <a:cs typeface="Oswald"/>
                 <a:sym typeface="Oswald"/>
               </a:rPr>
-              <a:t>Nguồn: Kaggle - "E-commerce Customer Behavior Dataset".</a:t>
+              <a:t>Source: Kaggle - "E-commerce Customer Behavior Dataset".</a:t>
             </a:r>
             <a:endParaRPr>
               <a:solidFill>
@@ -9380,7 +9151,7 @@
                 <a:cs typeface="Oswald"/>
                 <a:sym typeface="Oswald"/>
               </a:rPr>
-              <a:t>Số lượng: 50,000 dòng dữ liệu khách hàng.</a:t>
+              <a:t>Quantity: 50,000 rows of customer data.</a:t>
             </a:r>
             <a:endParaRPr>
               <a:solidFill>
@@ -9417,7 +9188,7 @@
                 <a:cs typeface="Oswald"/>
                 <a:sym typeface="Oswald"/>
               </a:rPr>
-              <a:t>Các thuộc tính chính (Key Features):</a:t>
+              <a:t>Key Features:</a:t>
             </a:r>
             <a:endParaRPr>
               <a:solidFill>
@@ -9454,7 +9225,7 @@
                 <a:cs typeface="Oswald"/>
                 <a:sym typeface="Oswald"/>
               </a:rPr>
-              <a:t>Nhân khẩu học: Age, Gender, Country, City.</a:t>
+              <a:t>Demographics: Age, Gender, Country, City.</a:t>
             </a:r>
             <a:endParaRPr sz="1800">
               <a:solidFill>
@@ -9491,7 +9262,7 @@
                 <a:cs typeface="Oswald"/>
                 <a:sym typeface="Oswald"/>
               </a:rPr>
-              <a:t>Hành vi trên web: Session Duration, Pages Per Session, Cart Abandonment Rate.</a:t>
+              <a:t>Web Behavior: Session Duration, Pages Per Session, Cart Abandonment Rate.</a:t>
             </a:r>
             <a:endParaRPr sz="1800">
               <a:solidFill>
@@ -9528,7 +9299,7 @@
                 <a:cs typeface="Oswald"/>
                 <a:sym typeface="Oswald"/>
               </a:rPr>
-              <a:t>Tương tác: Customer Service Calls, Product Reviews, Social Media Engagement.</a:t>
+              <a:t>Interactions: Customer Service Calls, Product Reviews, Social Media Engagement.</a:t>
             </a:r>
             <a:endParaRPr sz="1800">
               <a:solidFill>
@@ -9565,7 +9336,7 @@
                 <a:cs typeface="Oswald"/>
                 <a:sym typeface="Oswald"/>
               </a:rPr>
-              <a:t>Giao dịch: Total Purchases, Average Order Value, Days Since Last Purchase.</a:t>
+              <a:t>Transactions: Total Purchases, Average Order Value, Days Since Last Purchase.</a:t>
             </a:r>
             <a:endParaRPr sz="1800">
               <a:solidFill>
@@ -9602,34 +9373,7 @@
                 <a:cs typeface="Oswald"/>
                 <a:sym typeface="Oswald"/>
               </a:rPr>
-              <a:t>Biến mục tiêu (Target): </a:t>
-            </a:r>
-            <a:r>
-              <a:rPr lang="vi" sz="1800">
-                <a:solidFill>
-                  <a:srgbClr val="D0D0D0"/>
-                </a:solidFill>
-                <a:highlight>
-                  <a:srgbClr val="3C3C3C"/>
-                </a:highlight>
-                <a:latin typeface="Oswald"/>
-                <a:ea typeface="Oswald"/>
-                <a:cs typeface="Oswald"/>
-                <a:sym typeface="Oswald"/>
-              </a:rPr>
-              <a:t>Churned</a:t>
-            </a:r>
-            <a:r>
-              <a:rPr lang="vi" sz="1800">
-                <a:solidFill>
-                  <a:srgbClr val="CCCCCC"/>
-                </a:solidFill>
-                <a:latin typeface="Oswald"/>
-                <a:ea typeface="Oswald"/>
-                <a:cs typeface="Oswald"/>
-                <a:sym typeface="Oswald"/>
-              </a:rPr>
-              <a:t> (1: Rời bỏ, 0: Ở lại).</a:t>
+              <a:t>Target Variable: Churned (1: Leave, 0: Stay).</a:t>
             </a:r>
             <a:endParaRPr sz="1800">
               <a:solidFill>
@@ -9679,408 +9423,7 @@
   <p:cSld>
     <p:spTree>
       <p:nvGrpSpPr>
-        <p:cNvPr id="90" name="Shape 90"/>
-        <p:cNvGrpSpPr/>
-        <p:nvPr/>
-      </p:nvGrpSpPr>
-      <p:grpSpPr>
-        <a:xfrm>
-          <a:off x="0" y="0"/>
-          <a:ext cx="0" cy="0"/>
-          <a:chOff x="0" y="0"/>
-          <a:chExt cx="0" cy="0"/>
-        </a:xfrm>
-      </p:grpSpPr>
-      <p:sp>
-        <p:nvSpPr>
-          <p:cNvPr id="91" name="Google Shape;91;p16"/>
-          <p:cNvSpPr txBox="1"/>
-          <p:nvPr>
-            <p:ph type="title"/>
-          </p:nvPr>
-        </p:nvSpPr>
-        <p:spPr>
-          <a:xfrm>
-            <a:off x="265500" y="409326"/>
-            <a:ext cx="4045200" cy="3695100"/>
-          </a:xfrm>
-          <a:prstGeom prst="rect">
-            <a:avLst/>
-          </a:prstGeom>
-        </p:spPr>
-        <p:txBody>
-          <a:bodyPr anchorCtr="0" anchor="t" bIns="91425" lIns="91425" spcFirstLastPara="1" rIns="91425" wrap="square" tIns="91425">
-            <a:noAutofit/>
-          </a:bodyPr>
-          <a:lstStyle/>
-          <a:p>
-            <a:pPr indent="0" lvl="0" marL="0" rtl="0" algn="l">
-              <a:lnSpc>
-                <a:spcPct val="115000"/>
-              </a:lnSpc>
-              <a:spcBef>
-                <a:spcPts val="1000"/>
-              </a:spcBef>
-              <a:spcAft>
-                <a:spcPts val="0"/>
-              </a:spcAft>
-              <a:buNone/>
-            </a:pPr>
-            <a:r>
-              <a:rPr lang="vi" sz="1800">
-                <a:solidFill>
-                  <a:srgbClr val="CCCCCC"/>
-                </a:solidFill>
-              </a:rPr>
-              <a:t>Mục tiêu: </a:t>
-            </a:r>
-            <a:endParaRPr sz="1800">
-              <a:solidFill>
-                <a:srgbClr val="CCCCCC"/>
-              </a:solidFill>
-            </a:endParaRPr>
-          </a:p>
-          <a:p>
-            <a:pPr indent="-342900" lvl="0" marL="457200" rtl="0" algn="l">
-              <a:lnSpc>
-                <a:spcPct val="115000"/>
-              </a:lnSpc>
-              <a:spcBef>
-                <a:spcPts val="1000"/>
-              </a:spcBef>
-              <a:spcAft>
-                <a:spcPts val="0"/>
-              </a:spcAft>
-              <a:buClr>
-                <a:srgbClr val="CCCCCC"/>
-              </a:buClr>
-              <a:buSzPts val="1800"/>
-              <a:buFont typeface="Arial"/>
-              <a:buChar char="●"/>
-            </a:pPr>
-            <a:r>
-              <a:rPr lang="vi" sz="1800">
-                <a:solidFill>
-                  <a:srgbClr val="CCCCCC"/>
-                </a:solidFill>
-              </a:rPr>
-              <a:t>Tìm ra những yếu tố nào có mối tương quan mạnh nhất với việc khách hàng rời bỏ.</a:t>
-            </a:r>
-            <a:endParaRPr sz="1800">
-              <a:solidFill>
-                <a:srgbClr val="CCCCCC"/>
-              </a:solidFill>
-            </a:endParaRPr>
-          </a:p>
-          <a:p>
-            <a:pPr indent="0" lvl="0" marL="0" rtl="0" algn="l">
-              <a:lnSpc>
-                <a:spcPct val="115000"/>
-              </a:lnSpc>
-              <a:spcBef>
-                <a:spcPts val="1000"/>
-              </a:spcBef>
-              <a:spcAft>
-                <a:spcPts val="0"/>
-              </a:spcAft>
-              <a:buNone/>
-            </a:pPr>
-            <a:r>
-              <a:rPr lang="vi" sz="1800">
-                <a:solidFill>
-                  <a:srgbClr val="CCCCCC"/>
-                </a:solidFill>
-              </a:rPr>
-              <a:t>Phương pháp: </a:t>
-            </a:r>
-            <a:endParaRPr sz="1800">
-              <a:solidFill>
-                <a:srgbClr val="CCCCCC"/>
-              </a:solidFill>
-            </a:endParaRPr>
-          </a:p>
-          <a:p>
-            <a:pPr indent="-342900" lvl="0" marL="457200" rtl="0" algn="l">
-              <a:lnSpc>
-                <a:spcPct val="115000"/>
-              </a:lnSpc>
-              <a:spcBef>
-                <a:spcPts val="1000"/>
-              </a:spcBef>
-              <a:spcAft>
-                <a:spcPts val="0"/>
-              </a:spcAft>
-              <a:buClr>
-                <a:srgbClr val="CCCCCC"/>
-              </a:buClr>
-              <a:buSzPts val="1800"/>
-              <a:buFont typeface="Arial"/>
-              <a:buChar char="●"/>
-            </a:pPr>
-            <a:r>
-              <a:rPr lang="vi" sz="1800">
-                <a:solidFill>
-                  <a:srgbClr val="CCCCCC"/>
-                </a:solidFill>
-              </a:rPr>
-              <a:t>Tính toán hệ số tương quan Pearson.</a:t>
-            </a:r>
-            <a:endParaRPr sz="1800"/>
-          </a:p>
-        </p:txBody>
-      </p:sp>
-      <p:sp>
-        <p:nvSpPr>
-          <p:cNvPr id="92" name="Google Shape;92;p16"/>
-          <p:cNvSpPr txBox="1"/>
-          <p:nvPr>
-            <p:ph idx="2" type="body"/>
-          </p:nvPr>
-        </p:nvSpPr>
-        <p:spPr>
-          <a:xfrm>
-            <a:off x="4892850" y="409300"/>
-            <a:ext cx="3837000" cy="3695100"/>
-          </a:xfrm>
-          <a:prstGeom prst="rect">
-            <a:avLst/>
-          </a:prstGeom>
-        </p:spPr>
-        <p:txBody>
-          <a:bodyPr anchorCtr="0" anchor="ctr" bIns="91425" lIns="91425" spcFirstLastPara="1" rIns="91425" wrap="square" tIns="91425">
-            <a:noAutofit/>
-          </a:bodyPr>
-          <a:lstStyle/>
-          <a:p>
-            <a:pPr indent="0" lvl="0" marL="0" rtl="0" algn="l">
-              <a:spcBef>
-                <a:spcPts val="0"/>
-              </a:spcBef>
-              <a:spcAft>
-                <a:spcPts val="0"/>
-              </a:spcAft>
-              <a:buNone/>
-            </a:pPr>
-            <a:r>
-              <a:rPr lang="vi">
-                <a:latin typeface="Oswald"/>
-                <a:ea typeface="Oswald"/>
-                <a:cs typeface="Oswald"/>
-                <a:sym typeface="Oswald"/>
-              </a:rPr>
-              <a:t>Kết quả nổi bật:</a:t>
-            </a:r>
-            <a:endParaRPr>
-              <a:latin typeface="Oswald"/>
-              <a:ea typeface="Oswald"/>
-              <a:cs typeface="Oswald"/>
-              <a:sym typeface="Oswald"/>
-            </a:endParaRPr>
-          </a:p>
-          <a:p>
-            <a:pPr indent="-317500" lvl="0" marL="457200" rtl="0" algn="l">
-              <a:spcBef>
-                <a:spcPts val="1600"/>
-              </a:spcBef>
-              <a:spcAft>
-                <a:spcPts val="0"/>
-              </a:spcAft>
-              <a:buSzPts val="1400"/>
-              <a:buFont typeface="Oswald"/>
-              <a:buChar char="●"/>
-            </a:pPr>
-            <a:r>
-              <a:rPr lang="vi" sz="1400">
-                <a:latin typeface="Oswald"/>
-                <a:ea typeface="Oswald"/>
-                <a:cs typeface="Oswald"/>
-                <a:sym typeface="Oswald"/>
-              </a:rPr>
-              <a:t>Tương quan dương (Tăng khả năng rời bỏ):</a:t>
-            </a:r>
-            <a:endParaRPr sz="1400">
-              <a:latin typeface="Oswald"/>
-              <a:ea typeface="Oswald"/>
-              <a:cs typeface="Oswald"/>
-              <a:sym typeface="Oswald"/>
-            </a:endParaRPr>
-          </a:p>
-          <a:p>
-            <a:pPr indent="-317500" lvl="1" marL="914400" rtl="0" algn="l">
-              <a:spcBef>
-                <a:spcPts val="0"/>
-              </a:spcBef>
-              <a:spcAft>
-                <a:spcPts val="0"/>
-              </a:spcAft>
-              <a:buSzPts val="1400"/>
-              <a:buFont typeface="Oswald"/>
-              <a:buChar char="○"/>
-            </a:pPr>
-            <a:r>
-              <a:rPr lang="vi">
-                <a:latin typeface="Oswald"/>
-                <a:ea typeface="Oswald"/>
-                <a:cs typeface="Oswald"/>
-                <a:sym typeface="Oswald"/>
-              </a:rPr>
-              <a:t>Customer_Service_Calls (0.29): Càng gọi nhiều, càng dễ rời đi.</a:t>
-            </a:r>
-            <a:endParaRPr>
-              <a:latin typeface="Oswald"/>
-              <a:ea typeface="Oswald"/>
-              <a:cs typeface="Oswald"/>
-              <a:sym typeface="Oswald"/>
-            </a:endParaRPr>
-          </a:p>
-          <a:p>
-            <a:pPr indent="-317500" lvl="1" marL="914400" rtl="0" algn="l">
-              <a:spcBef>
-                <a:spcPts val="0"/>
-              </a:spcBef>
-              <a:spcAft>
-                <a:spcPts val="0"/>
-              </a:spcAft>
-              <a:buSzPts val="1400"/>
-              <a:buFont typeface="Oswald"/>
-              <a:buChar char="○"/>
-            </a:pPr>
-            <a:r>
-              <a:rPr lang="vi">
-                <a:latin typeface="Oswald"/>
-                <a:ea typeface="Oswald"/>
-                <a:cs typeface="Oswald"/>
-                <a:sym typeface="Oswald"/>
-              </a:rPr>
-              <a:t>Cart_Abandonment_Rate (0.28): Tỷ lệ bỏ giỏ hàng cao là một dấu hiệu xấu.</a:t>
-            </a:r>
-            <a:endParaRPr>
-              <a:latin typeface="Oswald"/>
-              <a:ea typeface="Oswald"/>
-              <a:cs typeface="Oswald"/>
-              <a:sym typeface="Oswald"/>
-            </a:endParaRPr>
-          </a:p>
-          <a:p>
-            <a:pPr indent="0" lvl="0" marL="0" rtl="0" algn="l">
-              <a:spcBef>
-                <a:spcPts val="0"/>
-              </a:spcBef>
-              <a:spcAft>
-                <a:spcPts val="0"/>
-              </a:spcAft>
-              <a:buNone/>
-            </a:pPr>
-            <a:r>
-              <a:t/>
-            </a:r>
-            <a:endParaRPr sz="1400">
-              <a:latin typeface="Oswald"/>
-              <a:ea typeface="Oswald"/>
-              <a:cs typeface="Oswald"/>
-              <a:sym typeface="Oswald"/>
-            </a:endParaRPr>
-          </a:p>
-          <a:p>
-            <a:pPr indent="-317500" lvl="0" marL="457200" rtl="0" algn="l">
-              <a:spcBef>
-                <a:spcPts val="0"/>
-              </a:spcBef>
-              <a:spcAft>
-                <a:spcPts val="0"/>
-              </a:spcAft>
-              <a:buSzPts val="1400"/>
-              <a:buFont typeface="Oswald"/>
-              <a:buChar char="●"/>
-            </a:pPr>
-            <a:r>
-              <a:rPr lang="vi" sz="1400">
-                <a:latin typeface="Oswald"/>
-                <a:ea typeface="Oswald"/>
-                <a:cs typeface="Oswald"/>
-                <a:sym typeface="Oswald"/>
-              </a:rPr>
-              <a:t>Tương quan âm (Giảm khả năng rời bỏ):</a:t>
-            </a:r>
-            <a:endParaRPr sz="1400">
-              <a:latin typeface="Oswald"/>
-              <a:ea typeface="Oswald"/>
-              <a:cs typeface="Oswald"/>
-              <a:sym typeface="Oswald"/>
-            </a:endParaRPr>
-          </a:p>
-          <a:p>
-            <a:pPr indent="-317500" lvl="1" marL="914400" rtl="0" algn="l">
-              <a:spcBef>
-                <a:spcPts val="0"/>
-              </a:spcBef>
-              <a:spcAft>
-                <a:spcPts val="0"/>
-              </a:spcAft>
-              <a:buSzPts val="1400"/>
-              <a:buFont typeface="Oswald"/>
-              <a:buChar char="○"/>
-            </a:pPr>
-            <a:r>
-              <a:rPr lang="vi">
-                <a:latin typeface="Oswald"/>
-                <a:ea typeface="Oswald"/>
-                <a:cs typeface="Oswald"/>
-                <a:sym typeface="Oswald"/>
-              </a:rPr>
-              <a:t>Pages_Per_Session (-0.22) &amp; Session_Duration_Avg (-0.22):  Tương tác càng nhiều, càng trung thành.</a:t>
-            </a:r>
-            <a:endParaRPr>
-              <a:latin typeface="Oswald"/>
-              <a:ea typeface="Oswald"/>
-              <a:cs typeface="Oswald"/>
-              <a:sym typeface="Oswald"/>
-            </a:endParaRPr>
-          </a:p>
-          <a:p>
-            <a:pPr indent="-317500" lvl="1" marL="914400" rtl="0" algn="l">
-              <a:spcBef>
-                <a:spcPts val="0"/>
-              </a:spcBef>
-              <a:spcAft>
-                <a:spcPts val="0"/>
-              </a:spcAft>
-              <a:buSzPts val="1400"/>
-              <a:buFont typeface="Oswald"/>
-              <a:buChar char="○"/>
-            </a:pPr>
-            <a:r>
-              <a:rPr lang="vi">
-                <a:latin typeface="Oswald"/>
-                <a:ea typeface="Oswald"/>
-                <a:cs typeface="Oswald"/>
-                <a:sym typeface="Oswald"/>
-              </a:rPr>
-              <a:t>Login_Frequency (-0.20): Đăng nhập thường xuyên cho thấy sự gắn bó</a:t>
-            </a:r>
-            <a:endParaRPr>
-              <a:latin typeface="Oswald"/>
-              <a:ea typeface="Oswald"/>
-              <a:cs typeface="Oswald"/>
-              <a:sym typeface="Oswald"/>
-            </a:endParaRPr>
-          </a:p>
-        </p:txBody>
-      </p:sp>
-    </p:spTree>
-  </p:cSld>
-  <p:clrMapOvr>
-    <a:masterClrMapping/>
-  </p:clrMapOvr>
-</p:sld>
-</file>
-
-<file path=ppt/slides/slide5.xml><?xml version="1.0" encoding="utf-8"?>
-<p:sld xmlns:a="http://schemas.openxmlformats.org/drawingml/2006/main" xmlns:r="http://schemas.openxmlformats.org/officeDocument/2006/relationships" xmlns:mc="http://schemas.openxmlformats.org/markup-compatibility/2006" xmlns:mv="urn:schemas-microsoft-com:mac:vml" xmlns:p="http://schemas.openxmlformats.org/presentationml/2006/main" xmlns:c="http://schemas.openxmlformats.org/drawingml/2006/chart" xmlns:dgm="http://schemas.openxmlformats.org/drawingml/2006/diagram" xmlns:o="urn:schemas-microsoft-com:office:office" xmlns:v="urn:schemas-microsoft-com:vml" xmlns:pvml="urn:schemas-microsoft-com:office:powerpoint" xmlns:com="http://schemas.openxmlformats.org/drawingml/2006/compatibility" xmlns:p14="http://schemas.microsoft.com/office/powerpoint/2010/main" xmlns:p15="http://schemas.microsoft.com/office/powerpoint/2012/main" xmlns:ahyp="http://schemas.microsoft.com/office/drawing/2018/hyperlinkcolor">
-  <p:cSld>
-    <p:spTree>
-      <p:nvGrpSpPr>
-        <p:cNvPr id="96" name="Shape 96"/>
+        <p:cNvPr id="87" name="Shape 87"/>
         <p:cNvGrpSpPr/>
         <p:nvPr/>
       </p:nvGrpSpPr>
@@ -10094,7 +9437,7 @@
       </p:grpSpPr>
       <p:pic>
         <p:nvPicPr>
-          <p:cNvPr id="97" name="Google Shape;97;p17"/>
+          <p:cNvPr id="88" name="Google Shape;88;p16"/>
           <p:cNvPicPr preferRelativeResize="0"/>
           <p:nvPr/>
         </p:nvPicPr>
@@ -10127,12 +9470,12 @@
 </p:sld>
 </file>
 
-<file path=ppt/slides/slide6.xml><?xml version="1.0" encoding="utf-8"?>
+<file path=ppt/slides/slide5.xml><?xml version="1.0" encoding="utf-8"?>
 <p:sld xmlns:a="http://schemas.openxmlformats.org/drawingml/2006/main" xmlns:r="http://schemas.openxmlformats.org/officeDocument/2006/relationships" xmlns:mc="http://schemas.openxmlformats.org/markup-compatibility/2006" xmlns:mv="urn:schemas-microsoft-com:mac:vml" xmlns:p="http://schemas.openxmlformats.org/presentationml/2006/main" xmlns:c="http://schemas.openxmlformats.org/drawingml/2006/chart" xmlns:dgm="http://schemas.openxmlformats.org/drawingml/2006/diagram" xmlns:o="urn:schemas-microsoft-com:office:office" xmlns:v="urn:schemas-microsoft-com:vml" xmlns:pvml="urn:schemas-microsoft-com:office:powerpoint" xmlns:com="http://schemas.openxmlformats.org/drawingml/2006/compatibility" xmlns:p14="http://schemas.microsoft.com/office/powerpoint/2010/main" xmlns:p15="http://schemas.microsoft.com/office/powerpoint/2012/main" xmlns:ahyp="http://schemas.microsoft.com/office/drawing/2018/hyperlinkcolor">
   <p:cSld>
     <p:spTree>
       <p:nvGrpSpPr>
-        <p:cNvPr id="101" name="Shape 101"/>
+        <p:cNvPr id="92" name="Shape 92"/>
         <p:cNvGrpSpPr/>
         <p:nvPr/>
       </p:nvGrpSpPr>
@@ -10146,7 +9489,7 @@
       </p:grpSpPr>
       <p:sp>
         <p:nvSpPr>
-          <p:cNvPr id="102" name="Google Shape;102;p18"/>
+          <p:cNvPr id="93" name="Google Shape;93;p17"/>
           <p:cNvSpPr txBox="1"/>
           <p:nvPr>
             <p:ph type="title"/>
@@ -10154,8 +9497,8 @@
         </p:nvSpPr>
         <p:spPr>
           <a:xfrm>
-            <a:off x="311700" y="445025"/>
-            <a:ext cx="8520600" cy="572700"/>
+            <a:off x="265500" y="409326"/>
+            <a:ext cx="4045200" cy="3695100"/>
           </a:xfrm>
           <a:prstGeom prst="rect">
             <a:avLst/>
@@ -10172,7 +9515,7 @@
                 <a:spcPct val="115000"/>
               </a:lnSpc>
               <a:spcBef>
-                <a:spcPts val="0"/>
+                <a:spcPts val="1000"/>
               </a:spcBef>
               <a:spcAft>
                 <a:spcPts val="0"/>
@@ -10185,26 +9528,432 @@
                   <a:srgbClr val="CCCCCC"/>
                 </a:solidFill>
               </a:rPr>
-              <a:t>Tỷ lệ churn gần như không có sự khác biệt lớn giữa các giới tính hoặc quý đăng ký. Điều này cho thấy các yếu tố hành vi quan trọng hơn.</a:t>
+              <a:t>Objective:</a:t>
             </a:r>
             <a:endParaRPr sz="1800">
               <a:solidFill>
-                <a:schemeClr val="accent3"/>
+                <a:srgbClr val="CCCCCC"/>
+              </a:solidFill>
+            </a:endParaRPr>
+          </a:p>
+          <a:p>
+            <a:pPr indent="-342900" lvl="0" marL="457200" rtl="0" algn="l">
+              <a:lnSpc>
+                <a:spcPct val="115000"/>
+              </a:lnSpc>
+              <a:spcBef>
+                <a:spcPts val="1000"/>
+              </a:spcBef>
+              <a:spcAft>
+                <a:spcPts val="0"/>
+              </a:spcAft>
+              <a:buClr>
+                <a:srgbClr val="CCCCCC"/>
+              </a:buClr>
+              <a:buSzPts val="1800"/>
+              <a:buFont typeface="Arial"/>
+              <a:buChar char="●"/>
+            </a:pPr>
+            <a:r>
+              <a:rPr lang="vi" sz="1800">
+                <a:solidFill>
+                  <a:srgbClr val="CCCCCC"/>
+                </a:solidFill>
+              </a:rPr>
+              <a:t>To identify which factors are most strongly correlated with customer churn.</a:t>
+            </a:r>
+            <a:endParaRPr sz="1800">
+              <a:solidFill>
+                <a:srgbClr val="CCCCCC"/>
               </a:solidFill>
             </a:endParaRPr>
           </a:p>
           <a:p>
             <a:pPr indent="0" lvl="0" marL="0" rtl="0" algn="l">
-              <a:spcBef>
-                <a:spcPts val="1600"/>
-              </a:spcBef>
-              <a:spcAft>
-                <a:spcPts val="0"/>
+              <a:lnSpc>
+                <a:spcPct val="115000"/>
+              </a:lnSpc>
+              <a:spcBef>
+                <a:spcPts val="1000"/>
+              </a:spcBef>
+              <a:spcAft>
+                <a:spcPts val="0"/>
+              </a:spcAft>
+              <a:buNone/>
+            </a:pPr>
+            <a:r>
+              <a:rPr lang="vi" sz="1800">
+                <a:solidFill>
+                  <a:srgbClr val="CCCCCC"/>
+                </a:solidFill>
+              </a:rPr>
+              <a:t>Method:</a:t>
+            </a:r>
+            <a:endParaRPr sz="1800">
+              <a:solidFill>
+                <a:srgbClr val="CCCCCC"/>
+              </a:solidFill>
+            </a:endParaRPr>
+          </a:p>
+          <a:p>
+            <a:pPr indent="-342900" lvl="0" marL="457200" rtl="0" algn="l">
+              <a:lnSpc>
+                <a:spcPct val="115000"/>
+              </a:lnSpc>
+              <a:spcBef>
+                <a:spcPts val="1000"/>
+              </a:spcBef>
+              <a:spcAft>
+                <a:spcPts val="0"/>
+              </a:spcAft>
+              <a:buClr>
+                <a:srgbClr val="CCCCCC"/>
+              </a:buClr>
+              <a:buSzPts val="1800"/>
+              <a:buFont typeface="Arial"/>
+              <a:buChar char="●"/>
+            </a:pPr>
+            <a:r>
+              <a:rPr lang="vi" sz="1800">
+                <a:solidFill>
+                  <a:srgbClr val="CCCCCC"/>
+                </a:solidFill>
+              </a:rPr>
+              <a:t>Calculate the Pearson correlation coefficient.</a:t>
+            </a:r>
+            <a:endParaRPr sz="1800">
+              <a:solidFill>
+                <a:srgbClr val="CCCCCC"/>
+              </a:solidFill>
+            </a:endParaRPr>
+          </a:p>
+          <a:p>
+            <a:pPr indent="0" lvl="0" marL="0" rtl="0" algn="l">
+              <a:lnSpc>
+                <a:spcPct val="115000"/>
+              </a:lnSpc>
+              <a:spcBef>
+                <a:spcPts val="1000"/>
+              </a:spcBef>
+              <a:spcAft>
+                <a:spcPts val="1000"/>
               </a:spcAft>
               <a:buNone/>
             </a:pPr>
             <a:r>
               <a:t/>
+            </a:r>
+            <a:endParaRPr sz="1800">
+              <a:solidFill>
+                <a:srgbClr val="CCCCCC"/>
+              </a:solidFill>
+            </a:endParaRPr>
+          </a:p>
+        </p:txBody>
+      </p:sp>
+      <p:sp>
+        <p:nvSpPr>
+          <p:cNvPr id="94" name="Google Shape;94;p17"/>
+          <p:cNvSpPr txBox="1"/>
+          <p:nvPr>
+            <p:ph idx="2" type="body"/>
+          </p:nvPr>
+        </p:nvSpPr>
+        <p:spPr>
+          <a:xfrm>
+            <a:off x="4892850" y="409300"/>
+            <a:ext cx="3837000" cy="4060200"/>
+          </a:xfrm>
+          <a:prstGeom prst="rect">
+            <a:avLst/>
+          </a:prstGeom>
+        </p:spPr>
+        <p:txBody>
+          <a:bodyPr anchorCtr="0" anchor="ctr" bIns="91425" lIns="91425" spcFirstLastPara="1" rIns="91425" wrap="square" tIns="91425">
+            <a:noAutofit/>
+          </a:bodyPr>
+          <a:lstStyle/>
+          <a:p>
+            <a:pPr indent="0" lvl="0" marL="0" rtl="0" algn="l">
+              <a:lnSpc>
+                <a:spcPct val="100000"/>
+              </a:lnSpc>
+              <a:spcBef>
+                <a:spcPts val="0"/>
+              </a:spcBef>
+              <a:spcAft>
+                <a:spcPts val="0"/>
+              </a:spcAft>
+              <a:buNone/>
+            </a:pPr>
+            <a:r>
+              <a:rPr lang="vi">
+                <a:latin typeface="Oswald"/>
+                <a:ea typeface="Oswald"/>
+                <a:cs typeface="Oswald"/>
+                <a:sym typeface="Oswald"/>
+              </a:rPr>
+              <a:t>Key findings:</a:t>
+            </a:r>
+            <a:endParaRPr>
+              <a:latin typeface="Oswald"/>
+              <a:ea typeface="Oswald"/>
+              <a:cs typeface="Oswald"/>
+              <a:sym typeface="Oswald"/>
+            </a:endParaRPr>
+          </a:p>
+          <a:p>
+            <a:pPr indent="-342900" lvl="0" marL="457200" rtl="0" algn="l">
+              <a:lnSpc>
+                <a:spcPct val="100000"/>
+              </a:lnSpc>
+              <a:spcBef>
+                <a:spcPts val="0"/>
+              </a:spcBef>
+              <a:spcAft>
+                <a:spcPts val="0"/>
+              </a:spcAft>
+              <a:buSzPts val="1800"/>
+              <a:buFont typeface="Oswald"/>
+              <a:buChar char="●"/>
+            </a:pPr>
+            <a:r>
+              <a:rPr lang="vi">
+                <a:latin typeface="Oswald"/>
+                <a:ea typeface="Oswald"/>
+                <a:cs typeface="Oswald"/>
+                <a:sym typeface="Oswald"/>
+              </a:rPr>
+              <a:t>Positive correlation :</a:t>
+            </a:r>
+            <a:endParaRPr>
+              <a:latin typeface="Oswald"/>
+              <a:ea typeface="Oswald"/>
+              <a:cs typeface="Oswald"/>
+              <a:sym typeface="Oswald"/>
+            </a:endParaRPr>
+          </a:p>
+          <a:p>
+            <a:pPr indent="-342900" lvl="1" marL="630000" rtl="0" algn="l">
+              <a:lnSpc>
+                <a:spcPct val="100000"/>
+              </a:lnSpc>
+              <a:spcBef>
+                <a:spcPts val="0"/>
+              </a:spcBef>
+              <a:spcAft>
+                <a:spcPts val="0"/>
+              </a:spcAft>
+              <a:buSzPts val="1800"/>
+              <a:buFont typeface="Oswald"/>
+              <a:buChar char="○"/>
+            </a:pPr>
+            <a:r>
+              <a:rPr lang="vi" sz="1800">
+                <a:latin typeface="Oswald"/>
+                <a:ea typeface="Oswald"/>
+                <a:cs typeface="Oswald"/>
+                <a:sym typeface="Oswald"/>
+              </a:rPr>
+              <a:t>Customer_Service_Calls (0.29): The more calls, the more likely customers are to leave.</a:t>
+            </a:r>
+            <a:endParaRPr sz="1800">
+              <a:latin typeface="Oswald"/>
+              <a:ea typeface="Oswald"/>
+              <a:cs typeface="Oswald"/>
+              <a:sym typeface="Oswald"/>
+            </a:endParaRPr>
+          </a:p>
+          <a:p>
+            <a:pPr indent="-342900" lvl="1" marL="630000" rtl="0" algn="l">
+              <a:lnSpc>
+                <a:spcPct val="100000"/>
+              </a:lnSpc>
+              <a:spcBef>
+                <a:spcPts val="0"/>
+              </a:spcBef>
+              <a:spcAft>
+                <a:spcPts val="0"/>
+              </a:spcAft>
+              <a:buSzPts val="1800"/>
+              <a:buFont typeface="Oswald"/>
+              <a:buChar char="○"/>
+            </a:pPr>
+            <a:r>
+              <a:rPr lang="vi" sz="1800">
+                <a:latin typeface="Oswald"/>
+                <a:ea typeface="Oswald"/>
+                <a:cs typeface="Oswald"/>
+                <a:sym typeface="Oswald"/>
+              </a:rPr>
+              <a:t>Cart_Abandonment_Rate (0.28): A high cart abandonment rate is a bad sign.</a:t>
+            </a:r>
+            <a:endParaRPr sz="1800">
+              <a:latin typeface="Oswald"/>
+              <a:ea typeface="Oswald"/>
+              <a:cs typeface="Oswald"/>
+              <a:sym typeface="Oswald"/>
+            </a:endParaRPr>
+          </a:p>
+          <a:p>
+            <a:pPr indent="-342900" lvl="0" marL="457200" rtl="0" algn="l">
+              <a:lnSpc>
+                <a:spcPct val="100000"/>
+              </a:lnSpc>
+              <a:spcBef>
+                <a:spcPts val="0"/>
+              </a:spcBef>
+              <a:spcAft>
+                <a:spcPts val="0"/>
+              </a:spcAft>
+              <a:buSzPts val="1800"/>
+              <a:buFont typeface="Oswald"/>
+              <a:buChar char="●"/>
+            </a:pPr>
+            <a:r>
+              <a:rPr lang="vi">
+                <a:latin typeface="Oswald"/>
+                <a:ea typeface="Oswald"/>
+                <a:cs typeface="Oswald"/>
+                <a:sym typeface="Oswald"/>
+              </a:rPr>
+              <a:t>Negative correlation:</a:t>
+            </a:r>
+            <a:endParaRPr>
+              <a:latin typeface="Oswald"/>
+              <a:ea typeface="Oswald"/>
+              <a:cs typeface="Oswald"/>
+              <a:sym typeface="Oswald"/>
+            </a:endParaRPr>
+          </a:p>
+          <a:p>
+            <a:pPr indent="-342900" lvl="1" marL="630000" rtl="0" algn="l">
+              <a:lnSpc>
+                <a:spcPct val="100000"/>
+              </a:lnSpc>
+              <a:spcBef>
+                <a:spcPts val="0"/>
+              </a:spcBef>
+              <a:spcAft>
+                <a:spcPts val="0"/>
+              </a:spcAft>
+              <a:buSzPts val="1800"/>
+              <a:buFont typeface="Oswald"/>
+              <a:buChar char="○"/>
+            </a:pPr>
+            <a:r>
+              <a:rPr lang="vi" sz="1800">
+                <a:latin typeface="Oswald"/>
+                <a:ea typeface="Oswald"/>
+                <a:cs typeface="Oswald"/>
+                <a:sym typeface="Oswald"/>
+              </a:rPr>
+              <a:t>Pages_Per_Session (-0.22) &amp; Session_Duration_Avg (-0.22): More interactions, more loyalty.</a:t>
+            </a:r>
+            <a:endParaRPr sz="1800">
+              <a:latin typeface="Oswald"/>
+              <a:ea typeface="Oswald"/>
+              <a:cs typeface="Oswald"/>
+              <a:sym typeface="Oswald"/>
+            </a:endParaRPr>
+          </a:p>
+          <a:p>
+            <a:pPr indent="-342900" lvl="1" marL="630000" rtl="0" algn="l">
+              <a:lnSpc>
+                <a:spcPct val="100000"/>
+              </a:lnSpc>
+              <a:spcBef>
+                <a:spcPts val="0"/>
+              </a:spcBef>
+              <a:spcAft>
+                <a:spcPts val="0"/>
+              </a:spcAft>
+              <a:buSzPts val="1800"/>
+              <a:buFont typeface="Oswald"/>
+              <a:buChar char="○"/>
+            </a:pPr>
+            <a:r>
+              <a:rPr lang="vi" sz="1800">
+                <a:latin typeface="Oswald"/>
+                <a:ea typeface="Oswald"/>
+                <a:cs typeface="Oswald"/>
+                <a:sym typeface="Oswald"/>
+              </a:rPr>
+              <a:t>Login_Frequency (-0.20): Frequent logins indicate engagement.</a:t>
+            </a:r>
+            <a:endParaRPr sz="1800">
+              <a:latin typeface="Oswald"/>
+              <a:ea typeface="Oswald"/>
+              <a:cs typeface="Oswald"/>
+              <a:sym typeface="Oswald"/>
+            </a:endParaRPr>
+          </a:p>
+        </p:txBody>
+      </p:sp>
+    </p:spTree>
+  </p:cSld>
+  <p:clrMapOvr>
+    <a:masterClrMapping/>
+  </p:clrMapOvr>
+</p:sld>
+</file>
+
+<file path=ppt/slides/slide6.xml><?xml version="1.0" encoding="utf-8"?>
+<p:sld xmlns:a="http://schemas.openxmlformats.org/drawingml/2006/main" xmlns:r="http://schemas.openxmlformats.org/officeDocument/2006/relationships" xmlns:mc="http://schemas.openxmlformats.org/markup-compatibility/2006" xmlns:mv="urn:schemas-microsoft-com:mac:vml" xmlns:p="http://schemas.openxmlformats.org/presentationml/2006/main" xmlns:c="http://schemas.openxmlformats.org/drawingml/2006/chart" xmlns:dgm="http://schemas.openxmlformats.org/drawingml/2006/diagram" xmlns:o="urn:schemas-microsoft-com:office:office" xmlns:v="urn:schemas-microsoft-com:vml" xmlns:pvml="urn:schemas-microsoft-com:office:powerpoint" xmlns:com="http://schemas.openxmlformats.org/drawingml/2006/compatibility" xmlns:p14="http://schemas.microsoft.com/office/powerpoint/2010/main" xmlns:p15="http://schemas.microsoft.com/office/powerpoint/2012/main" xmlns:ahyp="http://schemas.microsoft.com/office/drawing/2018/hyperlinkcolor">
+  <p:cSld>
+    <p:spTree>
+      <p:nvGrpSpPr>
+        <p:cNvPr id="98" name="Shape 98"/>
+        <p:cNvGrpSpPr/>
+        <p:nvPr/>
+      </p:nvGrpSpPr>
+      <p:grpSpPr>
+        <a:xfrm>
+          <a:off x="0" y="0"/>
+          <a:ext cx="0" cy="0"/>
+          <a:chOff x="0" y="0"/>
+          <a:chExt cx="0" cy="0"/>
+        </a:xfrm>
+      </p:grpSpPr>
+      <p:sp>
+        <p:nvSpPr>
+          <p:cNvPr id="99" name="Google Shape;99;p18"/>
+          <p:cNvSpPr txBox="1"/>
+          <p:nvPr>
+            <p:ph type="title"/>
+          </p:nvPr>
+        </p:nvSpPr>
+        <p:spPr>
+          <a:xfrm>
+            <a:off x="370025" y="340050"/>
+            <a:ext cx="8520600" cy="572700"/>
+          </a:xfrm>
+          <a:prstGeom prst="rect">
+            <a:avLst/>
+          </a:prstGeom>
+        </p:spPr>
+        <p:txBody>
+          <a:bodyPr anchorCtr="0" anchor="t" bIns="91425" lIns="91425" spcFirstLastPara="1" rIns="91425" wrap="square" tIns="91425">
+            <a:noAutofit/>
+          </a:bodyPr>
+          <a:lstStyle/>
+          <a:p>
+            <a:pPr indent="0" lvl="0" marL="0" rtl="0" algn="l">
+              <a:spcBef>
+                <a:spcPts val="0"/>
+              </a:spcBef>
+              <a:spcAft>
+                <a:spcPts val="0"/>
+              </a:spcAft>
+              <a:buNone/>
+            </a:pPr>
+            <a:r>
+              <a:rPr lang="vi" sz="1800">
+                <a:solidFill>
+                  <a:srgbClr val="CCCCCC"/>
+                </a:solidFill>
+              </a:rPr>
+              <a:t>The churn rate showed almost no significant difference between genders or quarters of registration. This suggests that behavioral factors are more important.</a:t>
             </a:r>
             <a:endParaRPr/>
           </a:p>
@@ -10212,7 +9961,7 @@
       </p:sp>
       <p:sp>
         <p:nvSpPr>
-          <p:cNvPr id="103" name="Google Shape;103;p18"/>
+          <p:cNvPr id="100" name="Google Shape;100;p18"/>
           <p:cNvSpPr txBox="1"/>
           <p:nvPr>
             <p:ph idx="1" type="body"/>
@@ -10251,7 +10000,7 @@
       </p:sp>
       <p:sp>
         <p:nvSpPr>
-          <p:cNvPr id="104" name="Google Shape;104;p18"/>
+          <p:cNvPr id="101" name="Google Shape;101;p18"/>
           <p:cNvSpPr txBox="1"/>
           <p:nvPr>
             <p:ph idx="2" type="body"/>
@@ -10295,7 +10044,7 @@
       </p:sp>
       <p:pic>
         <p:nvPicPr>
-          <p:cNvPr id="105" name="Google Shape;105;p18"/>
+          <p:cNvPr id="102" name="Google Shape;102;p18"/>
           <p:cNvPicPr preferRelativeResize="0"/>
           <p:nvPr/>
         </p:nvPicPr>
@@ -10323,7 +10072,7 @@
       </p:pic>
       <p:pic>
         <p:nvPicPr>
-          <p:cNvPr id="106" name="Google Shape;106;p18"/>
+          <p:cNvPr id="103" name="Google Shape;103;p18"/>
           <p:cNvPicPr preferRelativeResize="0"/>
           <p:nvPr/>
         </p:nvPicPr>
@@ -10362,7 +10111,7 @@
   <p:cSld>
     <p:spTree>
       <p:nvGrpSpPr>
-        <p:cNvPr id="110" name="Shape 110"/>
+        <p:cNvPr id="107" name="Shape 107"/>
         <p:cNvGrpSpPr/>
         <p:nvPr/>
       </p:nvGrpSpPr>
@@ -10376,7 +10125,7 @@
       </p:grpSpPr>
       <p:sp>
         <p:nvSpPr>
-          <p:cNvPr id="111" name="Google Shape;111;p19"/>
+          <p:cNvPr id="108" name="Google Shape;108;p19"/>
           <p:cNvSpPr txBox="1"/>
           <p:nvPr>
             <p:ph idx="1" type="body"/>
@@ -10412,7 +10161,7 @@
                   <a:srgbClr val="CCCCCC"/>
                 </a:solidFill>
               </a:rPr>
-              <a:t>Khách hàng rời bỏ (Churned=1) có trung vị số cuộc gọi hỗ trợ cao hơn đáng kể. Đây là một chỉ báo mạnh mẽ về sự không hài lòng.</a:t>
+              <a:t>Customers who leave (Churned=1) have a significantly higher median number of support calls. This is a strong indicator of dissatisfaction.</a:t>
             </a:r>
             <a:endParaRPr sz="1800"/>
           </a:p>
@@ -10420,7 +10169,7 @@
       </p:sp>
       <p:pic>
         <p:nvPicPr>
-          <p:cNvPr id="112" name="Google Shape;112;p19"/>
+          <p:cNvPr id="109" name="Google Shape;109;p19"/>
           <p:cNvPicPr preferRelativeResize="0"/>
           <p:nvPr/>
         </p:nvPicPr>
@@ -10459,7 +10208,7 @@
   <p:cSld>
     <p:spTree>
       <p:nvGrpSpPr>
-        <p:cNvPr id="116" name="Shape 116"/>
+        <p:cNvPr id="113" name="Shape 113"/>
         <p:cNvGrpSpPr/>
         <p:nvPr/>
       </p:nvGrpSpPr>
@@ -10473,7 +10222,7 @@
       </p:grpSpPr>
       <p:sp>
         <p:nvSpPr>
-          <p:cNvPr id="117" name="Google Shape;117;p20"/>
+          <p:cNvPr id="114" name="Google Shape;114;p20"/>
           <p:cNvSpPr txBox="1"/>
           <p:nvPr>
             <p:ph idx="4294967295" type="title"/>
@@ -10507,29 +10256,36 @@
               <a:buNone/>
             </a:pPr>
             <a:r>
-              <a:rPr lang="vi" sz="2400">
+              <a:rPr b="1" lang="vi" sz="2400">
                 <a:solidFill>
                   <a:srgbClr val="CCCCCC"/>
                 </a:solidFill>
-                <a:latin typeface="Oswald SemiBold"/>
-                <a:ea typeface="Oswald SemiBold"/>
-                <a:cs typeface="Oswald SemiBold"/>
-                <a:sym typeface="Oswald SemiBold"/>
               </a:rPr>
-              <a:t>Xây dựng Mô hình Dự đoán</a:t>
+              <a:t>Building </a:t>
             </a:r>
-            <a:endParaRPr sz="2400">
-              <a:latin typeface="Oswald SemiBold"/>
-              <a:ea typeface="Oswald SemiBold"/>
-              <a:cs typeface="Oswald SemiBold"/>
-              <a:sym typeface="Oswald SemiBold"/>
-            </a:endParaRPr>
+            <a:r>
+              <a:rPr b="1" lang="vi" sz="2400">
+                <a:solidFill>
+                  <a:srgbClr val="CCCCCC"/>
+                </a:solidFill>
+              </a:rPr>
+              <a:t>Logistic Regression </a:t>
+            </a:r>
+            <a:r>
+              <a:rPr b="1" lang="vi" sz="2400">
+                <a:solidFill>
+                  <a:srgbClr val="CCCCCC"/>
+                </a:solidFill>
+              </a:rPr>
+              <a:t>Model</a:t>
+            </a:r>
+            <a:endParaRPr b="1" sz="2400"/>
           </a:p>
         </p:txBody>
       </p:sp>
       <p:sp>
         <p:nvSpPr>
-          <p:cNvPr id="118" name="Google Shape;118;p20"/>
+          <p:cNvPr id="115" name="Google Shape;115;p20"/>
           <p:cNvSpPr txBox="1"/>
           <p:nvPr>
             <p:ph idx="4294967295" type="body"/>
@@ -10574,7 +10330,118 @@
                 <a:cs typeface="Oswald"/>
                 <a:sym typeface="Oswald"/>
               </a:rPr>
-              <a:t>Mô hình lựa chọn: Logistic Regression</a:t>
+              <a:t>Model of Choice: Logistic Regression. A good, easy-to-interpret, and effective foundational model for binary classification problems.</a:t>
+            </a:r>
+            <a:endParaRPr sz="1400">
+              <a:solidFill>
+                <a:srgbClr val="CCCCCC"/>
+              </a:solidFill>
+              <a:latin typeface="Oswald"/>
+              <a:ea typeface="Oswald"/>
+              <a:cs typeface="Oswald"/>
+              <a:sym typeface="Oswald"/>
+            </a:endParaRPr>
+          </a:p>
+          <a:p>
+            <a:pPr indent="-317500" lvl="0" marL="457200" rtl="0" algn="l">
+              <a:spcBef>
+                <a:spcPts val="0"/>
+              </a:spcBef>
+              <a:spcAft>
+                <a:spcPts val="0"/>
+              </a:spcAft>
+              <a:buClr>
+                <a:srgbClr val="CCCCCC"/>
+              </a:buClr>
+              <a:buSzPts val="1400"/>
+              <a:buFont typeface="Arial"/>
+              <a:buChar char="●"/>
+            </a:pPr>
+            <a:r>
+              <a:rPr lang="vi" sz="1400">
+                <a:solidFill>
+                  <a:srgbClr val="CCCCCC"/>
+                </a:solidFill>
+                <a:latin typeface="Oswald"/>
+                <a:ea typeface="Oswald"/>
+                <a:cs typeface="Oswald"/>
+                <a:sym typeface="Oswald"/>
+              </a:rPr>
+              <a:t>Preparing data for the model: One-Hot Encoding: Convert categorical variables (Gender, City, Country, etc.) into numerical form.</a:t>
+            </a:r>
+            <a:endParaRPr sz="1400">
+              <a:solidFill>
+                <a:srgbClr val="CCCCCC"/>
+              </a:solidFill>
+              <a:latin typeface="Oswald"/>
+              <a:ea typeface="Oswald"/>
+              <a:cs typeface="Oswald"/>
+              <a:sym typeface="Oswald"/>
+            </a:endParaRPr>
+          </a:p>
+          <a:p>
+            <a:pPr indent="-317500" lvl="0" marL="457200" rtl="0" algn="l">
+              <a:spcBef>
+                <a:spcPts val="0"/>
+              </a:spcBef>
+              <a:spcAft>
+                <a:spcPts val="0"/>
+              </a:spcAft>
+              <a:buClr>
+                <a:srgbClr val="CCCCCC"/>
+              </a:buClr>
+              <a:buSzPts val="1400"/>
+              <a:buFont typeface="Arial"/>
+              <a:buChar char="●"/>
+            </a:pPr>
+            <a:r>
+              <a:rPr lang="vi" sz="1400">
+                <a:solidFill>
+                  <a:srgbClr val="CCCCCC"/>
+                </a:solidFill>
+                <a:latin typeface="Oswald"/>
+                <a:ea typeface="Oswald"/>
+                <a:cs typeface="Oswald"/>
+                <a:sym typeface="Oswald"/>
+              </a:rPr>
+              <a:t>Standard Scaling: Normalize the variables so they have the same scale.</a:t>
+            </a:r>
+            <a:endParaRPr sz="1400">
+              <a:solidFill>
+                <a:srgbClr val="CCCCCC"/>
+              </a:solidFill>
+              <a:latin typeface="Oswald"/>
+              <a:ea typeface="Oswald"/>
+              <a:cs typeface="Oswald"/>
+              <a:sym typeface="Oswald"/>
+            </a:endParaRPr>
+          </a:p>
+          <a:p>
+            <a:pPr indent="-317500" lvl="0" marL="457200" rtl="0" algn="l">
+              <a:spcBef>
+                <a:spcPts val="0"/>
+              </a:spcBef>
+              <a:spcAft>
+                <a:spcPts val="0"/>
+              </a:spcAft>
+              <a:buClr>
+                <a:srgbClr val="CCCCCC"/>
+              </a:buClr>
+              <a:buSzPts val="1400"/>
+              <a:buFont typeface="Arial"/>
+              <a:buChar char="●"/>
+            </a:pPr>
+            <a:r>
+              <a:rPr lang="vi" sz="1400">
+                <a:solidFill>
+                  <a:srgbClr val="CCCCCC"/>
+                </a:solidFill>
+                <a:latin typeface="Oswald"/>
+                <a:ea typeface="Oswald"/>
+                <a:cs typeface="Oswald"/>
+                <a:sym typeface="Oswald"/>
+              </a:rPr>
+              <a:t>Data allocation:</a:t>
             </a:r>
             <a:endParaRPr sz="1400">
               <a:solidFill>
@@ -10598,11 +10465,11 @@
                 <a:srgbClr val="CCCCCC"/>
               </a:buClr>
               <a:buSzPts val="1400"/>
-              <a:buFont typeface="Oswald"/>
+              <a:buFont typeface="Arial"/>
               <a:buChar char="○"/>
             </a:pPr>
             <a:r>
-              <a:rPr lang="vi">
+              <a:rPr lang="vi" sz="1400">
                 <a:solidFill>
                   <a:srgbClr val="CCCCCC"/>
                 </a:solidFill>
@@ -10611,44 +10478,7 @@
                 <a:cs typeface="Oswald"/>
                 <a:sym typeface="Oswald"/>
               </a:rPr>
-              <a:t>Là một mô hình nền tảng tốt, dễ diễn giải và hiệu quả cho bài toán phân loại nhị phân.</a:t>
-            </a:r>
-            <a:endParaRPr>
-              <a:solidFill>
-                <a:srgbClr val="CCCCCC"/>
-              </a:solidFill>
-              <a:latin typeface="Oswald"/>
-              <a:ea typeface="Oswald"/>
-              <a:cs typeface="Oswald"/>
-              <a:sym typeface="Oswald"/>
-            </a:endParaRPr>
-          </a:p>
-          <a:p>
-            <a:pPr indent="-317500" lvl="0" marL="457200" rtl="0" algn="l">
-              <a:spcBef>
-                <a:spcPts val="0"/>
-              </a:spcBef>
-              <a:spcAft>
-                <a:spcPts val="0"/>
-              </a:spcAft>
-              <a:buClr>
-                <a:srgbClr val="CCCCCC"/>
-              </a:buClr>
-              <a:buSzPts val="1400"/>
-              <a:buFont typeface="Oswald"/>
-              <a:buChar char="●"/>
-            </a:pPr>
-            <a:r>
-              <a:rPr lang="vi" sz="1400">
-                <a:solidFill>
-                  <a:srgbClr val="CCCCCC"/>
-                </a:solidFill>
-                <a:latin typeface="Oswald"/>
-                <a:ea typeface="Oswald"/>
-                <a:cs typeface="Oswald"/>
-                <a:sym typeface="Oswald"/>
-              </a:rPr>
-              <a:t>Chuẩn bị dữ liệu cho mô hình:</a:t>
+              <a:t>80% for the Training set.</a:t>
             </a:r>
             <a:endParaRPr sz="1400">
               <a:solidFill>
@@ -10676,7 +10506,7 @@
               <a:buChar char="○"/>
             </a:pPr>
             <a:r>
-              <a:rPr lang="vi">
+              <a:rPr lang="vi" sz="1400">
                 <a:solidFill>
                   <a:srgbClr val="CCCCCC"/>
                 </a:solidFill>
@@ -10685,81 +10515,7 @@
                 <a:cs typeface="Oswald"/>
                 <a:sym typeface="Oswald"/>
               </a:rPr>
-              <a:t>One-Hot Encoding: Chuyển đổi các biến phân loại (Gender, City, Country...) thành dạng số.</a:t>
-            </a:r>
-            <a:endParaRPr>
-              <a:solidFill>
-                <a:srgbClr val="CCCCCC"/>
-              </a:solidFill>
-              <a:latin typeface="Oswald"/>
-              <a:ea typeface="Oswald"/>
-              <a:cs typeface="Oswald"/>
-              <a:sym typeface="Oswald"/>
-            </a:endParaRPr>
-          </a:p>
-          <a:p>
-            <a:pPr indent="-317500" lvl="1" marL="914400" rtl="0" algn="l">
-              <a:spcBef>
-                <a:spcPts val="0"/>
-              </a:spcBef>
-              <a:spcAft>
-                <a:spcPts val="0"/>
-              </a:spcAft>
-              <a:buClr>
-                <a:srgbClr val="CCCCCC"/>
-              </a:buClr>
-              <a:buSzPts val="1400"/>
-              <a:buFont typeface="Arial"/>
-              <a:buChar char="○"/>
-            </a:pPr>
-            <a:r>
-              <a:rPr lang="vi">
-                <a:solidFill>
-                  <a:srgbClr val="CCCCCC"/>
-                </a:solidFill>
-                <a:latin typeface="Oswald"/>
-                <a:ea typeface="Oswald"/>
-                <a:cs typeface="Oswald"/>
-                <a:sym typeface="Oswald"/>
-              </a:rPr>
-              <a:t>Standard Scaling: Chuẩn hóa các biến số để chúng có cùng một thang đo.</a:t>
-            </a:r>
-            <a:endParaRPr>
-              <a:solidFill>
-                <a:srgbClr val="CCCCCC"/>
-              </a:solidFill>
-              <a:latin typeface="Oswald"/>
-              <a:ea typeface="Oswald"/>
-              <a:cs typeface="Oswald"/>
-              <a:sym typeface="Oswald"/>
-            </a:endParaRPr>
-          </a:p>
-          <a:p>
-            <a:pPr indent="-317500" lvl="0" marL="457200" rtl="0" algn="l">
-              <a:spcBef>
-                <a:spcPts val="0"/>
-              </a:spcBef>
-              <a:spcAft>
-                <a:spcPts val="0"/>
-              </a:spcAft>
-              <a:buClr>
-                <a:srgbClr val="CCCCCC"/>
-              </a:buClr>
-              <a:buSzPts val="1400"/>
-              <a:buFont typeface="Oswald"/>
-              <a:buChar char="●"/>
-            </a:pPr>
-            <a:r>
-              <a:rPr lang="vi" sz="1400">
-                <a:solidFill>
-                  <a:srgbClr val="CCCCCC"/>
-                </a:solidFill>
-                <a:latin typeface="Oswald"/>
-                <a:ea typeface="Oswald"/>
-                <a:cs typeface="Oswald"/>
-                <a:sym typeface="Oswald"/>
-              </a:rPr>
-              <a:t>Phân chia dữ liệu:</a:t>
+              <a:t>20% for the Testing set.</a:t>
             </a:r>
             <a:endParaRPr sz="1400">
               <a:solidFill>
@@ -10771,85 +10527,11 @@
               <a:sym typeface="Oswald"/>
             </a:endParaRPr>
           </a:p>
-          <a:p>
-            <a:pPr indent="-317500" lvl="1" marL="914400" rtl="0" algn="l">
-              <a:spcBef>
-                <a:spcPts val="0"/>
-              </a:spcBef>
-              <a:spcAft>
-                <a:spcPts val="0"/>
-              </a:spcAft>
-              <a:buClr>
-                <a:srgbClr val="CCCCCC"/>
-              </a:buClr>
-              <a:buSzPts val="1400"/>
-              <a:buFont typeface="Oswald"/>
-              <a:buChar char="○"/>
-            </a:pPr>
-            <a:r>
-              <a:rPr lang="vi">
-                <a:solidFill>
-                  <a:srgbClr val="CCCCCC"/>
-                </a:solidFill>
-                <a:latin typeface="Oswald"/>
-                <a:ea typeface="Oswald"/>
-                <a:cs typeface="Oswald"/>
-                <a:sym typeface="Oswald"/>
-              </a:rPr>
-              <a:t>80% cho tập Huấn luyện (Training set).</a:t>
-            </a:r>
-            <a:endParaRPr>
-              <a:solidFill>
-                <a:srgbClr val="CCCCCC"/>
-              </a:solidFill>
-              <a:latin typeface="Oswald"/>
-              <a:ea typeface="Oswald"/>
-              <a:cs typeface="Oswald"/>
-              <a:sym typeface="Oswald"/>
-            </a:endParaRPr>
-          </a:p>
-          <a:p>
-            <a:pPr indent="-317500" lvl="1" marL="914400" rtl="0" algn="l">
-              <a:spcBef>
-                <a:spcPts val="0"/>
-              </a:spcBef>
-              <a:spcAft>
-                <a:spcPts val="0"/>
-              </a:spcAft>
-              <a:buClr>
-                <a:srgbClr val="CCCCCC"/>
-              </a:buClr>
-              <a:buSzPts val="1400"/>
-              <a:buFont typeface="Oswald"/>
-              <a:buChar char="○"/>
-            </a:pPr>
-            <a:r>
-              <a:rPr lang="vi">
-                <a:solidFill>
-                  <a:srgbClr val="CCCCCC"/>
-                </a:solidFill>
-                <a:latin typeface="Oswald"/>
-                <a:ea typeface="Oswald"/>
-                <a:cs typeface="Oswald"/>
-                <a:sym typeface="Oswald"/>
-              </a:rPr>
-              <a:t>20% cho tập Kiểm tra (Testing set).</a:t>
-            </a:r>
-            <a:endParaRPr>
-              <a:solidFill>
-                <a:schemeClr val="dk1"/>
-              </a:solidFill>
-              <a:latin typeface="Oswald"/>
-              <a:ea typeface="Oswald"/>
-              <a:cs typeface="Oswald"/>
-              <a:sym typeface="Oswald"/>
-            </a:endParaRPr>
-          </a:p>
         </p:txBody>
       </p:sp>
       <p:sp>
         <p:nvSpPr>
-          <p:cNvPr id="119" name="Google Shape;119;p20"/>
+          <p:cNvPr id="116" name="Google Shape;116;p20"/>
           <p:cNvSpPr txBox="1"/>
           <p:nvPr>
             <p:ph idx="4294967295" type="body"/>
@@ -10905,7 +10587,7 @@
       </p:sp>
       <p:sp>
         <p:nvSpPr>
-          <p:cNvPr id="120" name="Google Shape;120;p20"/>
+          <p:cNvPr id="117" name="Google Shape;117;p20"/>
           <p:cNvSpPr/>
           <p:nvPr/>
         </p:nvSpPr>
@@ -10948,7 +10630,7 @@
       </p:sp>
       <p:sp>
         <p:nvSpPr>
-          <p:cNvPr id="121" name="Google Shape;121;p20"/>
+          <p:cNvPr id="118" name="Google Shape;118;p20"/>
           <p:cNvSpPr/>
           <p:nvPr/>
         </p:nvSpPr>
@@ -10991,7 +10673,7 @@
       </p:sp>
       <p:sp>
         <p:nvSpPr>
-          <p:cNvPr id="122" name="Google Shape;122;p20"/>
+          <p:cNvPr id="119" name="Google Shape;119;p20"/>
           <p:cNvSpPr txBox="1"/>
           <p:nvPr>
             <p:ph idx="4294967295" type="body"/>
@@ -11050,7 +10732,7 @@
       </p:sp>
       <p:sp>
         <p:nvSpPr>
-          <p:cNvPr id="123" name="Google Shape;123;p20"/>
+          <p:cNvPr id="120" name="Google Shape;120;p20"/>
           <p:cNvSpPr txBox="1"/>
           <p:nvPr>
             <p:ph idx="4294967295" type="body"/>
@@ -11106,7 +10788,7 @@
       </p:sp>
       <p:sp>
         <p:nvSpPr>
-          <p:cNvPr id="124" name="Google Shape;124;p20"/>
+          <p:cNvPr id="121" name="Google Shape;121;p20"/>
           <p:cNvSpPr/>
           <p:nvPr/>
         </p:nvSpPr>
@@ -11149,7 +10831,7 @@
       </p:sp>
       <p:sp>
         <p:nvSpPr>
-          <p:cNvPr id="125" name="Google Shape;125;p20"/>
+          <p:cNvPr id="122" name="Google Shape;122;p20"/>
           <p:cNvSpPr/>
           <p:nvPr/>
         </p:nvSpPr>
@@ -11192,7 +10874,7 @@
       </p:sp>
       <p:sp>
         <p:nvSpPr>
-          <p:cNvPr id="126" name="Google Shape;126;p20"/>
+          <p:cNvPr id="123" name="Google Shape;123;p20"/>
           <p:cNvSpPr txBox="1"/>
           <p:nvPr>
             <p:ph idx="4294967295" type="body"/>
@@ -11251,7 +10933,7 @@
       </p:sp>
       <p:sp>
         <p:nvSpPr>
-          <p:cNvPr id="127" name="Google Shape;127;p20"/>
+          <p:cNvPr id="124" name="Google Shape;124;p20"/>
           <p:cNvSpPr txBox="1"/>
           <p:nvPr>
             <p:ph idx="4294967295" type="body"/>
@@ -11307,7 +10989,7 @@
       </p:sp>
       <p:sp>
         <p:nvSpPr>
-          <p:cNvPr id="128" name="Google Shape;128;p20"/>
+          <p:cNvPr id="125" name="Google Shape;125;p20"/>
           <p:cNvSpPr/>
           <p:nvPr/>
         </p:nvSpPr>
@@ -11350,7 +11032,7 @@
       </p:sp>
       <p:sp>
         <p:nvSpPr>
-          <p:cNvPr id="129" name="Google Shape;129;p20"/>
+          <p:cNvPr id="126" name="Google Shape;126;p20"/>
           <p:cNvSpPr/>
           <p:nvPr/>
         </p:nvSpPr>
@@ -11393,7 +11075,7 @@
       </p:sp>
       <p:sp>
         <p:nvSpPr>
-          <p:cNvPr id="130" name="Google Shape;130;p20"/>
+          <p:cNvPr id="127" name="Google Shape;127;p20"/>
           <p:cNvSpPr txBox="1"/>
           <p:nvPr>
             <p:ph idx="4294967295" type="body"/>
@@ -11452,7 +11134,7 @@
       </p:sp>
       <p:sp>
         <p:nvSpPr>
-          <p:cNvPr id="131" name="Google Shape;131;p20"/>
+          <p:cNvPr id="128" name="Google Shape;128;p20"/>
           <p:cNvSpPr txBox="1"/>
           <p:nvPr>
             <p:ph idx="4294967295" type="body"/>
@@ -11508,7 +11190,7 @@
       </p:sp>
       <p:sp>
         <p:nvSpPr>
-          <p:cNvPr id="132" name="Google Shape;132;p20"/>
+          <p:cNvPr id="129" name="Google Shape;129;p20"/>
           <p:cNvSpPr/>
           <p:nvPr/>
         </p:nvSpPr>
@@ -11551,7 +11233,7 @@
       </p:sp>
       <p:sp>
         <p:nvSpPr>
-          <p:cNvPr id="133" name="Google Shape;133;p20"/>
+          <p:cNvPr id="130" name="Google Shape;130;p20"/>
           <p:cNvSpPr/>
           <p:nvPr/>
         </p:nvSpPr>
@@ -11594,7 +11276,7 @@
       </p:sp>
       <p:sp>
         <p:nvSpPr>
-          <p:cNvPr id="134" name="Google Shape;134;p20"/>
+          <p:cNvPr id="131" name="Google Shape;131;p20"/>
           <p:cNvSpPr txBox="1"/>
           <p:nvPr>
             <p:ph idx="4294967295" type="body"/>
@@ -11664,7 +11346,7 @@
   <p:cSld>
     <p:spTree>
       <p:nvGrpSpPr>
-        <p:cNvPr id="138" name="Shape 138"/>
+        <p:cNvPr id="135" name="Shape 135"/>
         <p:cNvGrpSpPr/>
         <p:nvPr/>
       </p:nvGrpSpPr>
@@ -11678,7 +11360,7 @@
       </p:grpSpPr>
       <p:sp>
         <p:nvSpPr>
-          <p:cNvPr id="139" name="Google Shape;139;p21"/>
+          <p:cNvPr id="136" name="Google Shape;136;p21"/>
           <p:cNvSpPr txBox="1"/>
           <p:nvPr>
             <p:ph type="title"/>
@@ -11731,7 +11413,7 @@
       </p:sp>
       <p:pic>
         <p:nvPicPr>
-          <p:cNvPr id="140" name="Google Shape;140;p21"/>
+          <p:cNvPr id="137" name="Google Shape;137;p21"/>
           <p:cNvPicPr preferRelativeResize="0"/>
           <p:nvPr/>
         </p:nvPicPr>
@@ -11759,7 +11441,7 @@
       </p:pic>
       <p:pic>
         <p:nvPicPr>
-          <p:cNvPr id="141" name="Google Shape;141;p21"/>
+          <p:cNvPr id="138" name="Google Shape;138;p21"/>
           <p:cNvPicPr preferRelativeResize="0"/>
           <p:nvPr/>
         </p:nvPicPr>
@@ -11794,6 +11476,285 @@
 </file>
 
 <file path=ppt/theme/theme1.xml><?xml version="1.0" encoding="utf-8"?>
+<a:theme xmlns:a="http://schemas.openxmlformats.org/drawingml/2006/main" xmlns:r="http://schemas.openxmlformats.org/officeDocument/2006/relationships">
+  <a:themeElements>
+    <a:clrScheme name="Default">
+      <a:dk1>
+        <a:srgbClr val="000000"/>
+      </a:dk1>
+      <a:lt1>
+        <a:srgbClr val="FFFFFF"/>
+      </a:lt1>
+      <a:dk2>
+        <a:srgbClr val="158158"/>
+      </a:dk2>
+      <a:lt2>
+        <a:srgbClr val="F3F3F3"/>
+      </a:lt2>
+      <a:accent1>
+        <a:srgbClr val="058DC7"/>
+      </a:accent1>
+      <a:accent2>
+        <a:srgbClr val="50B432"/>
+      </a:accent2>
+      <a:accent3>
+        <a:srgbClr val="ED561B"/>
+      </a:accent3>
+      <a:accent4>
+        <a:srgbClr val="EDEF00"/>
+      </a:accent4>
+      <a:accent5>
+        <a:srgbClr val="24CBE5"/>
+      </a:accent5>
+      <a:accent6>
+        <a:srgbClr val="64E572"/>
+      </a:accent6>
+      <a:hlink>
+        <a:srgbClr val="2200CC"/>
+      </a:hlink>
+      <a:folHlink>
+        <a:srgbClr val="551A8B"/>
+      </a:folHlink>
+    </a:clrScheme>
+    <a:fontScheme name="Office">
+      <a:majorFont>
+        <a:latin typeface="Arial"/>
+        <a:ea typeface=""/>
+        <a:cs typeface=""/>
+        <a:font script="Jpan" typeface="ＭＳ Ｐゴシック"/>
+        <a:font script="Hang" typeface="맑은 고딕"/>
+        <a:font script="Hans" typeface="宋体"/>
+        <a:font script="Hant" typeface="新細明體"/>
+        <a:font script="Arab" typeface="Times New Roman"/>
+        <a:font script="Hebr" typeface="Times New Roman"/>
+        <a:font script="Thai" typeface="Angsana New"/>
+        <a:font script="Ethi" typeface="Nyala"/>
+        <a:font script="Beng" typeface="Vrinda"/>
+        <a:font script="Gujr" typeface="Shruti"/>
+        <a:font script="Khmr" typeface="MoolBoran"/>
+        <a:font script="Knda" typeface="Tunga"/>
+        <a:font script="Guru" typeface="Raavi"/>
+        <a:font script="Cans" typeface="Euphemia"/>
+        <a:font script="Cher" typeface="Plantagenet Cherokee"/>
+        <a:font script="Yiii" typeface="Microsoft Yi Baiti"/>
+        <a:font script="Tibt" typeface="Microsoft Himalaya"/>
+        <a:font script="Thaa" typeface="MV Boli"/>
+        <a:font script="Deva" typeface="Mangal"/>
+        <a:font script="Telu" typeface="Gautami"/>
+        <a:font script="Taml" typeface="Latha"/>
+        <a:font script="Syrc" typeface="Estrangelo Edessa"/>
+        <a:font script="Orya" typeface="Kalinga"/>
+        <a:font script="Mlym" typeface="Kartika"/>
+        <a:font script="Laoo" typeface="DokChampa"/>
+        <a:font script="Sinh" typeface="Iskoola Pota"/>
+        <a:font script="Mong" typeface="Mongolian Baiti"/>
+        <a:font script="Viet" typeface="Times New Roman"/>
+        <a:font script="Uigh" typeface="Microsoft Uighur"/>
+        <a:font script="Geor" typeface="Sylfaen"/>
+      </a:majorFont>
+      <a:minorFont>
+        <a:latin typeface="Arial"/>
+        <a:ea typeface=""/>
+        <a:cs typeface=""/>
+        <a:font script="Jpan" typeface="ＭＳ Ｐゴシック"/>
+        <a:font script="Hang" typeface="맑은 고딕"/>
+        <a:font script="Hans" typeface="宋体"/>
+        <a:font script="Hant" typeface="新細明體"/>
+        <a:font script="Arab" typeface="Arial"/>
+        <a:font script="Hebr" typeface="Arial"/>
+        <a:font script="Thai" typeface="Cordia New"/>
+        <a:font script="Ethi" typeface="Nyala"/>
+        <a:font script="Beng" typeface="Vrinda"/>
+        <a:font script="Gujr" typeface="Shruti"/>
+        <a:font script="Khmr" typeface="DaunPenh"/>
+        <a:font script="Knda" typeface="Tunga"/>
+        <a:font script="Guru" typeface="Raavi"/>
+        <a:font script="Cans" typeface="Euphemia"/>
+        <a:font script="Cher" typeface="Plantagenet Cherokee"/>
+        <a:font script="Yiii" typeface="Microsoft Yi Baiti"/>
+        <a:font script="Tibt" typeface="Microsoft Himalaya"/>
+        <a:font script="Thaa" typeface="MV Boli"/>
+        <a:font script="Deva" typeface="Mangal"/>
+        <a:font script="Telu" typeface="Gautami"/>
+        <a:font script="Taml" typeface="Latha"/>
+        <a:font script="Syrc" typeface="Estrangelo Edessa"/>
+        <a:font script="Orya" typeface="Kalinga"/>
+        <a:font script="Mlym" typeface="Kartika"/>
+        <a:font script="Laoo" typeface="DokChampa"/>
+        <a:font script="Sinh" typeface="Iskoola Pota"/>
+        <a:font script="Mong" typeface="Mongolian Baiti"/>
+        <a:font script="Viet" typeface="Arial"/>
+        <a:font script="Uigh" typeface="Microsoft Uighur"/>
+        <a:font script="Geor" typeface="Sylfaen"/>
+      </a:minorFont>
+    </a:fontScheme>
+    <a:fmtScheme name="Office">
+      <a:fillStyleLst>
+        <a:solidFill>
+          <a:schemeClr val="phClr"/>
+        </a:solidFill>
+        <a:gradFill rotWithShape="1">
+          <a:gsLst>
+            <a:gs pos="0">
+              <a:schemeClr val="phClr">
+                <a:tint val="50000"/>
+                <a:satMod val="300000"/>
+              </a:schemeClr>
+            </a:gs>
+            <a:gs pos="35000">
+              <a:schemeClr val="phClr">
+                <a:tint val="37000"/>
+                <a:satMod val="300000"/>
+              </a:schemeClr>
+            </a:gs>
+            <a:gs pos="100000">
+              <a:schemeClr val="phClr">
+                <a:tint val="15000"/>
+                <a:satMod val="350000"/>
+              </a:schemeClr>
+            </a:gs>
+          </a:gsLst>
+          <a:lin ang="16200000" scaled="1"/>
+        </a:gradFill>
+        <a:gradFill rotWithShape="1">
+          <a:gsLst>
+            <a:gs pos="0">
+              <a:schemeClr val="phClr">
+                <a:tint val="100000"/>
+                <a:shade val="100000"/>
+                <a:satMod val="130000"/>
+              </a:schemeClr>
+            </a:gs>
+            <a:gs pos="100000">
+              <a:schemeClr val="phClr">
+                <a:tint val="50000"/>
+                <a:shade val="100000"/>
+                <a:satMod val="350000"/>
+              </a:schemeClr>
+            </a:gs>
+          </a:gsLst>
+          <a:lin ang="16200000" scaled="0"/>
+        </a:gradFill>
+      </a:fillStyleLst>
+      <a:lnStyleLst>
+        <a:ln w="9525" cap="flat" cmpd="sng" algn="ctr">
+          <a:solidFill>
+            <a:schemeClr val="phClr">
+              <a:shade val="95000"/>
+              <a:satMod val="105000"/>
+            </a:schemeClr>
+          </a:solidFill>
+          <a:prstDash val="solid"/>
+        </a:ln>
+        <a:ln w="25400" cap="flat" cmpd="sng" algn="ctr">
+          <a:solidFill>
+            <a:schemeClr val="phClr"/>
+          </a:solidFill>
+          <a:prstDash val="solid"/>
+        </a:ln>
+        <a:ln w="38100" cap="flat" cmpd="sng" algn="ctr">
+          <a:solidFill>
+            <a:schemeClr val="phClr"/>
+          </a:solidFill>
+          <a:prstDash val="solid"/>
+        </a:ln>
+      </a:lnStyleLst>
+      <a:effectStyleLst>
+        <a:effectStyle>
+          <a:effectLst>
+            <a:outerShdw blurRad="40000" dist="20000" dir="5400000" rotWithShape="0">
+              <a:srgbClr val="000000">
+                <a:alpha val="38000"/>
+              </a:srgbClr>
+            </a:outerShdw>
+          </a:effectLst>
+        </a:effectStyle>
+        <a:effectStyle>
+          <a:effectLst>
+            <a:outerShdw blurRad="40000" dist="23000" dir="5400000" rotWithShape="0">
+              <a:srgbClr val="000000">
+                <a:alpha val="35000"/>
+              </a:srgbClr>
+            </a:outerShdw>
+          </a:effectLst>
+        </a:effectStyle>
+        <a:effectStyle>
+          <a:effectLst>
+            <a:outerShdw blurRad="40000" dist="23000" dir="5400000" rotWithShape="0">
+              <a:srgbClr val="000000">
+                <a:alpha val="35000"/>
+              </a:srgbClr>
+            </a:outerShdw>
+          </a:effectLst>
+          <a:scene3d>
+            <a:camera prst="orthographicFront">
+              <a:rot lat="0" lon="0" rev="0"/>
+            </a:camera>
+            <a:lightRig rig="threePt" dir="t">
+              <a:rot lat="0" lon="0" rev="1200000"/>
+            </a:lightRig>
+          </a:scene3d>
+          <a:sp3d>
+            <a:bevelT w="63500" h="25400"/>
+          </a:sp3d>
+        </a:effectStyle>
+      </a:effectStyleLst>
+      <a:bgFillStyleLst>
+        <a:solidFill>
+          <a:schemeClr val="phClr"/>
+        </a:solidFill>
+        <a:gradFill rotWithShape="1">
+          <a:gsLst>
+            <a:gs pos="0">
+              <a:schemeClr val="phClr">
+                <a:tint val="40000"/>
+                <a:satMod val="350000"/>
+              </a:schemeClr>
+            </a:gs>
+            <a:gs pos="40000">
+              <a:schemeClr val="phClr">
+                <a:tint val="45000"/>
+                <a:shade val="99000"/>
+                <a:satMod val="350000"/>
+              </a:schemeClr>
+            </a:gs>
+            <a:gs pos="100000">
+              <a:schemeClr val="phClr">
+                <a:shade val="20000"/>
+                <a:satMod val="255000"/>
+              </a:schemeClr>
+            </a:gs>
+          </a:gsLst>
+          <a:path path="circle">
+            <a:fillToRect l="50000" t="-80000" r="50000" b="180000"/>
+          </a:path>
+        </a:gradFill>
+        <a:gradFill rotWithShape="1">
+          <a:gsLst>
+            <a:gs pos="0">
+              <a:schemeClr val="phClr">
+                <a:tint val="80000"/>
+                <a:satMod val="300000"/>
+              </a:schemeClr>
+            </a:gs>
+            <a:gs pos="100000">
+              <a:schemeClr val="phClr">
+                <a:shade val="30000"/>
+                <a:satMod val="200000"/>
+              </a:schemeClr>
+            </a:gs>
+          </a:gsLst>
+          <a:path path="circle">
+            <a:fillToRect l="50000" t="50000" r="50000" b="50000"/>
+          </a:path>
+        </a:gradFill>
+      </a:bgFillStyleLst>
+    </a:fmtScheme>
+  </a:themeElements>
+</a:theme>
+</file>
+
+<file path=ppt/theme/theme2.xml><?xml version="1.0" encoding="utf-8"?>
 <a:theme xmlns:a="http://schemas.openxmlformats.org/drawingml/2006/main" xmlns:r="http://schemas.openxmlformats.org/officeDocument/2006/relationships" name="Slate">
   <a:themeElements>
     <a:clrScheme name="Slate">
@@ -12070,283 +12031,4 @@
     </a:fmtScheme>
   </a:themeElements>
 </a:theme>
-</file>
-
-<file path=ppt/theme/theme2.xml><?xml version="1.0" encoding="utf-8"?>
-<a:theme xmlns:a="http://schemas.openxmlformats.org/drawingml/2006/main" xmlns:r="http://schemas.openxmlformats.org/officeDocument/2006/relationships">
-  <a:themeElements>
-    <a:clrScheme name="Default">
-      <a:dk1>
-        <a:srgbClr val="000000"/>
-      </a:dk1>
-      <a:lt1>
-        <a:srgbClr val="FFFFFF"/>
-      </a:lt1>
-      <a:dk2>
-        <a:srgbClr val="158158"/>
-      </a:dk2>
-      <a:lt2>
-        <a:srgbClr val="F3F3F3"/>
-      </a:lt2>
-      <a:accent1>
-        <a:srgbClr val="058DC7"/>
-      </a:accent1>
-      <a:accent2>
-        <a:srgbClr val="50B432"/>
-      </a:accent2>
-      <a:accent3>
-        <a:srgbClr val="ED561B"/>
-      </a:accent3>
-      <a:accent4>
-        <a:srgbClr val="EDEF00"/>
-      </a:accent4>
-      <a:accent5>
-        <a:srgbClr val="24CBE5"/>
-      </a:accent5>
-      <a:accent6>
-        <a:srgbClr val="64E572"/>
-      </a:accent6>
-      <a:hlink>
-        <a:srgbClr val="2200CC"/>
-      </a:hlink>
-      <a:folHlink>
-        <a:srgbClr val="551A8B"/>
-      </a:folHlink>
-    </a:clrScheme>
-    <a:fontScheme name="Office">
-      <a:majorFont>
-        <a:latin typeface="Arial"/>
-        <a:ea typeface=""/>
-        <a:cs typeface=""/>
-        <a:font script="Jpan" typeface="ＭＳ Ｐゴシック"/>
-        <a:font script="Hang" typeface="맑은 고딕"/>
-        <a:font script="Hans" typeface="宋体"/>
-        <a:font script="Hant" typeface="新細明體"/>
-        <a:font script="Arab" typeface="Times New Roman"/>
-        <a:font script="Hebr" typeface="Times New Roman"/>
-        <a:font script="Thai" typeface="Angsana New"/>
-        <a:font script="Ethi" typeface="Nyala"/>
-        <a:font script="Beng" typeface="Vrinda"/>
-        <a:font script="Gujr" typeface="Shruti"/>
-        <a:font script="Khmr" typeface="MoolBoran"/>
-        <a:font script="Knda" typeface="Tunga"/>
-        <a:font script="Guru" typeface="Raavi"/>
-        <a:font script="Cans" typeface="Euphemia"/>
-        <a:font script="Cher" typeface="Plantagenet Cherokee"/>
-        <a:font script="Yiii" typeface="Microsoft Yi Baiti"/>
-        <a:font script="Tibt" typeface="Microsoft Himalaya"/>
-        <a:font script="Thaa" typeface="MV Boli"/>
-        <a:font script="Deva" typeface="Mangal"/>
-        <a:font script="Telu" typeface="Gautami"/>
-        <a:font script="Taml" typeface="Latha"/>
-        <a:font script="Syrc" typeface="Estrangelo Edessa"/>
-        <a:font script="Orya" typeface="Kalinga"/>
-        <a:font script="Mlym" typeface="Kartika"/>
-        <a:font script="Laoo" typeface="DokChampa"/>
-        <a:font script="Sinh" typeface="Iskoola Pota"/>
-        <a:font script="Mong" typeface="Mongolian Baiti"/>
-        <a:font script="Viet" typeface="Times New Roman"/>
-        <a:font script="Uigh" typeface="Microsoft Uighur"/>
-        <a:font script="Geor" typeface="Sylfaen"/>
-      </a:majorFont>
-      <a:minorFont>
-        <a:latin typeface="Arial"/>
-        <a:ea typeface=""/>
-        <a:cs typeface=""/>
-        <a:font script="Jpan" typeface="ＭＳ Ｐゴシック"/>
-        <a:font script="Hang" typeface="맑은 고딕"/>
-        <a:font script="Hans" typeface="宋体"/>
-        <a:font script="Hant" typeface="新細明體"/>
-        <a:font script="Arab" typeface="Arial"/>
-        <a:font script="Hebr" typeface="Arial"/>
-        <a:font script="Thai" typeface="Cordia New"/>
-        <a:font script="Ethi" typeface="Nyala"/>
-        <a:font script="Beng" typeface="Vrinda"/>
-        <a:font script="Gujr" typeface="Shruti"/>
-        <a:font script="Khmr" typeface="DaunPenh"/>
-        <a:font script="Knda" typeface="Tunga"/>
-        <a:font script="Guru" typeface="Raavi"/>
-        <a:font script="Cans" typeface="Euphemia"/>
-        <a:font script="Cher" typeface="Plantagenet Cherokee"/>
-        <a:font script="Yiii" typeface="Microsoft Yi Baiti"/>
-        <a:font script="Tibt" typeface="Microsoft Himalaya"/>
-        <a:font script="Thaa" typeface="MV Boli"/>
-        <a:font script="Deva" typeface="Mangal"/>
-        <a:font script="Telu" typeface="Gautami"/>
-        <a:font script="Taml" typeface="Latha"/>
-        <a:font script="Syrc" typeface="Estrangelo Edessa"/>
-        <a:font script="Orya" typeface="Kalinga"/>
-        <a:font script="Mlym" typeface="Kartika"/>
-        <a:font script="Laoo" typeface="DokChampa"/>
-        <a:font script="Sinh" typeface="Iskoola Pota"/>
-        <a:font script="Mong" typeface="Mongolian Baiti"/>
-        <a:font script="Viet" typeface="Arial"/>
-        <a:font script="Uigh" typeface="Microsoft Uighur"/>
-        <a:font script="Geor" typeface="Sylfaen"/>
-      </a:minorFont>
-    </a:fontScheme>
-    <a:fmtScheme name="Office">
-      <a:fillStyleLst>
-        <a:solidFill>
-          <a:schemeClr val="phClr"/>
-        </a:solidFill>
-        <a:gradFill rotWithShape="1">
-          <a:gsLst>
-            <a:gs pos="0">
-              <a:schemeClr val="phClr">
-                <a:tint val="50000"/>
-                <a:satMod val="300000"/>
-              </a:schemeClr>
-            </a:gs>
-            <a:gs pos="35000">
-              <a:schemeClr val="phClr">
-                <a:tint val="37000"/>
-                <a:satMod val="300000"/>
-              </a:schemeClr>
-            </a:gs>
-            <a:gs pos="100000">
-              <a:schemeClr val="phClr">
-                <a:tint val="15000"/>
-                <a:satMod val="350000"/>
-              </a:schemeClr>
-            </a:gs>
-          </a:gsLst>
-          <a:lin ang="16200000" scaled="1"/>
-        </a:gradFill>
-        <a:gradFill rotWithShape="1">
-          <a:gsLst>
-            <a:gs pos="0">
-              <a:schemeClr val="phClr">
-                <a:tint val="100000"/>
-                <a:shade val="100000"/>
-                <a:satMod val="130000"/>
-              </a:schemeClr>
-            </a:gs>
-            <a:gs pos="100000">
-              <a:schemeClr val="phClr">
-                <a:tint val="50000"/>
-                <a:shade val="100000"/>
-                <a:satMod val="350000"/>
-              </a:schemeClr>
-            </a:gs>
-          </a:gsLst>
-          <a:lin ang="16200000" scaled="0"/>
-        </a:gradFill>
-      </a:fillStyleLst>
-      <a:lnStyleLst>
-        <a:ln w="9525" cap="flat" cmpd="sng" algn="ctr">
-          <a:solidFill>
-            <a:schemeClr val="phClr">
-              <a:shade val="95000"/>
-              <a:satMod val="105000"/>
-            </a:schemeClr>
-          </a:solidFill>
-          <a:prstDash val="solid"/>
-        </a:ln>
-        <a:ln w="25400" cap="flat" cmpd="sng" algn="ctr">
-          <a:solidFill>
-            <a:schemeClr val="phClr"/>
-          </a:solidFill>
-          <a:prstDash val="solid"/>
-        </a:ln>
-        <a:ln w="38100" cap="flat" cmpd="sng" algn="ctr">
-          <a:solidFill>
-            <a:schemeClr val="phClr"/>
-          </a:solidFill>
-          <a:prstDash val="solid"/>
-        </a:ln>
-      </a:lnStyleLst>
-      <a:effectStyleLst>
-        <a:effectStyle>
-          <a:effectLst>
-            <a:outerShdw blurRad="40000" dist="20000" dir="5400000" rotWithShape="0">
-              <a:srgbClr val="000000">
-                <a:alpha val="38000"/>
-              </a:srgbClr>
-            </a:outerShdw>
-          </a:effectLst>
-        </a:effectStyle>
-        <a:effectStyle>
-          <a:effectLst>
-            <a:outerShdw blurRad="40000" dist="23000" dir="5400000" rotWithShape="0">
-              <a:srgbClr val="000000">
-                <a:alpha val="35000"/>
-              </a:srgbClr>
-            </a:outerShdw>
-          </a:effectLst>
-        </a:effectStyle>
-        <a:effectStyle>
-          <a:effectLst>
-            <a:outerShdw blurRad="40000" dist="23000" dir="5400000" rotWithShape="0">
-              <a:srgbClr val="000000">
-                <a:alpha val="35000"/>
-              </a:srgbClr>
-            </a:outerShdw>
-          </a:effectLst>
-          <a:scene3d>
-            <a:camera prst="orthographicFront">
-              <a:rot lat="0" lon="0" rev="0"/>
-            </a:camera>
-            <a:lightRig rig="threePt" dir="t">
-              <a:rot lat="0" lon="0" rev="1200000"/>
-            </a:lightRig>
-          </a:scene3d>
-          <a:sp3d>
-            <a:bevelT w="63500" h="25400"/>
-          </a:sp3d>
-        </a:effectStyle>
-      </a:effectStyleLst>
-      <a:bgFillStyleLst>
-        <a:solidFill>
-          <a:schemeClr val="phClr"/>
-        </a:solidFill>
-        <a:gradFill rotWithShape="1">
-          <a:gsLst>
-            <a:gs pos="0">
-              <a:schemeClr val="phClr">
-                <a:tint val="40000"/>
-                <a:satMod val="350000"/>
-              </a:schemeClr>
-            </a:gs>
-            <a:gs pos="40000">
-              <a:schemeClr val="phClr">
-                <a:tint val="45000"/>
-                <a:shade val="99000"/>
-                <a:satMod val="350000"/>
-              </a:schemeClr>
-            </a:gs>
-            <a:gs pos="100000">
-              <a:schemeClr val="phClr">
-                <a:shade val="20000"/>
-                <a:satMod val="255000"/>
-              </a:schemeClr>
-            </a:gs>
-          </a:gsLst>
-          <a:path path="circle">
-            <a:fillToRect l="50000" t="-80000" r="50000" b="180000"/>
-          </a:path>
-        </a:gradFill>
-        <a:gradFill rotWithShape="1">
-          <a:gsLst>
-            <a:gs pos="0">
-              <a:schemeClr val="phClr">
-                <a:tint val="80000"/>
-                <a:satMod val="300000"/>
-              </a:schemeClr>
-            </a:gs>
-            <a:gs pos="100000">
-              <a:schemeClr val="phClr">
-                <a:shade val="30000"/>
-                <a:satMod val="200000"/>
-              </a:schemeClr>
-            </a:gs>
-          </a:gsLst>
-          <a:path path="circle">
-            <a:fillToRect l="50000" t="50000" r="50000" b="50000"/>
-          </a:path>
-        </a:gradFill>
-      </a:bgFillStyleLst>
-    </a:fmtScheme>
-  </a:themeElements>
-</a:theme>
 </file>